--- a/SIH2026 PPT.pptx
+++ b/SIH2026 PPT.pptx
@@ -5,7 +5,7 @@
     <p:sldMasterId id="2147483648" r:id="rId1"/>
   </p:sldMasterIdLst>
   <p:notesMasterIdLst>
-    <p:notesMasterId r:id="rId9"/>
+    <p:notesMasterId r:id="rId8"/>
   </p:notesMasterIdLst>
   <p:sldIdLst>
     <p:sldId id="291" r:id="rId2"/>
@@ -13,8 +13,7 @@
     <p:sldId id="290" r:id="rId4"/>
     <p:sldId id="293" r:id="rId5"/>
     <p:sldId id="294" r:id="rId6"/>
-    <p:sldId id="296" r:id="rId7"/>
-    <p:sldId id="297" r:id="rId8"/>
+    <p:sldId id="298" r:id="rId7"/>
   </p:sldIdLst>
   <p:sldSz cx="12192000" cy="6858000"/>
   <p:notesSz cx="6858000" cy="9144000"/>
@@ -262,7 +261,7 @@
             <a:fld id="{C4D5ADD5-2BBC-4A94-8F86-D9013941F742}" type="datetimeFigureOut">
               <a:rPr lang="en-US"/>
               <a:pPr/>
-              <a:t>6/2/2026</a:t>
+              <a:t>9/2/2026</a:t>
             </a:fld>
             <a:endParaRPr lang="en-US"/>
           </a:p>
@@ -1352,184 +1351,6 @@
 </p:notes>
 </file>
 
-<file path=ppt/notesSlides/notesSlide6.xml><?xml version="1.0" encoding="utf-8"?>
-<p:notes xmlns:a="http://schemas.openxmlformats.org/drawingml/2006/main" xmlns:r="http://schemas.openxmlformats.org/officeDocument/2006/relationships" xmlns:p="http://schemas.openxmlformats.org/presentationml/2006/main">
-  <p:cSld>
-    <p:spTree>
-      <p:nvGrpSpPr>
-        <p:cNvPr id="1" name=""/>
-        <p:cNvGrpSpPr/>
-        <p:nvPr/>
-      </p:nvGrpSpPr>
-      <p:grpSpPr>
-        <a:xfrm>
-          <a:off x="0" y="0"/>
-          <a:ext cx="0" cy="0"/>
-          <a:chOff x="0" y="0"/>
-          <a:chExt cx="0" cy="0"/>
-        </a:xfrm>
-      </p:grpSpPr>
-      <p:sp>
-        <p:nvSpPr>
-          <p:cNvPr id="18433" name="Slide Image Placeholder 1"/>
-          <p:cNvSpPr>
-            <a:spLocks noGrp="1" noRot="1" noChangeAspect="1"/>
-          </p:cNvSpPr>
-          <p:nvPr>
-            <p:ph type="sldImg"/>
-          </p:nvPr>
-        </p:nvSpPr>
-        <p:spPr bwMode="auto">
-          <a:xfrm>
-            <a:off x="381000" y="685800"/>
-            <a:ext cx="6096000" cy="3429000"/>
-          </a:xfrm>
-          <a:noFill/>
-          <a:ln>
-            <a:solidFill>
-              <a:srgbClr val="000000"/>
-            </a:solidFill>
-            <a:miter lim="800000"/>
-            <a:headEnd/>
-            <a:tailEnd/>
-          </a:ln>
-        </p:spPr>
-      </p:sp>
-      <p:sp>
-        <p:nvSpPr>
-          <p:cNvPr id="18434" name="Notes Placeholder 2"/>
-          <p:cNvSpPr>
-            <a:spLocks noGrp="1"/>
-          </p:cNvSpPr>
-          <p:nvPr>
-            <p:ph type="body" idx="1"/>
-          </p:nvPr>
-        </p:nvSpPr>
-        <p:spPr bwMode="auto">
-          <a:noFill/>
-        </p:spPr>
-        <p:txBody>
-          <a:bodyPr wrap="square" numCol="1" anchor="t" anchorCtr="0" compatLnSpc="1">
-            <a:prstTxWarp prst="textNoShape">
-              <a:avLst/>
-            </a:prstTxWarp>
-          </a:bodyPr>
-          <a:lstStyle/>
-          <a:p>
-            <a:pPr eaLnBrk="1" hangingPunct="1">
-              <a:spcBef>
-                <a:spcPct val="0"/>
-              </a:spcBef>
-            </a:pPr>
-            <a:endParaRPr lang="en-US">
-              <a:ea typeface="ＭＳ Ｐゴシック" pitchFamily="1" charset="-128"/>
-            </a:endParaRPr>
-          </a:p>
-        </p:txBody>
-      </p:sp>
-      <p:sp>
-        <p:nvSpPr>
-          <p:cNvPr id="18435" name="Slide Number Placeholder 3"/>
-          <p:cNvSpPr>
-            <a:spLocks noGrp="1"/>
-          </p:cNvSpPr>
-          <p:nvPr>
-            <p:ph type="sldNum" sz="quarter" idx="5"/>
-          </p:nvPr>
-        </p:nvSpPr>
-        <p:spPr bwMode="auto">
-          <a:noFill/>
-          <a:ln>
-            <a:miter lim="800000"/>
-            <a:headEnd/>
-            <a:tailEnd/>
-          </a:ln>
-        </p:spPr>
-        <p:txBody>
-          <a:bodyPr/>
-          <a:lstStyle/>
-          <a:p>
-            <a:pPr marL="0" marR="0" lvl="0" indent="0" algn="r" defTabSz="457200" rtl="0" eaLnBrk="1" fontAlgn="base" latinLnBrk="0" hangingPunct="1">
-              <a:lnSpc>
-                <a:spcPct val="100000"/>
-              </a:lnSpc>
-              <a:spcBef>
-                <a:spcPct val="0"/>
-              </a:spcBef>
-              <a:spcAft>
-                <a:spcPct val="0"/>
-              </a:spcAft>
-              <a:buClrTx/>
-              <a:buSzTx/>
-              <a:buFontTx/>
-              <a:buNone/>
-              <a:tabLst/>
-              <a:defRPr/>
-            </a:pPr>
-            <a:fld id="{0CA7B74D-3791-4AC6-8451-F10DBCCCDD9A}" type="slidenum">
-              <a:rPr kumimoji="0" lang="en-US" sz="1200" b="0" i="0" u="none" strike="noStrike" kern="1200" cap="none" spc="0" normalizeH="0" baseline="0" noProof="0">
-                <a:ln>
-                  <a:noFill/>
-                </a:ln>
-                <a:solidFill>
-                  <a:prstClr val="black"/>
-                </a:solidFill>
-                <a:effectLst/>
-                <a:uLnTx/>
-                <a:uFillTx/>
-                <a:latin typeface="Calibri" pitchFamily="34" charset="0"/>
-                <a:ea typeface="ＭＳ Ｐゴシック" pitchFamily="1" charset="-128"/>
-                <a:cs typeface="+mn-cs"/>
-              </a:rPr>
-              <a:pPr marL="0" marR="0" lvl="0" indent="0" algn="r" defTabSz="457200" rtl="0" eaLnBrk="1" fontAlgn="base" latinLnBrk="0" hangingPunct="1">
-                <a:lnSpc>
-                  <a:spcPct val="100000"/>
-                </a:lnSpc>
-                <a:spcBef>
-                  <a:spcPct val="0"/>
-                </a:spcBef>
-                <a:spcAft>
-                  <a:spcPct val="0"/>
-                </a:spcAft>
-                <a:buClrTx/>
-                <a:buSzTx/>
-                <a:buFontTx/>
-                <a:buNone/>
-                <a:tabLst/>
-                <a:defRPr/>
-              </a:pPr>
-              <a:t>7</a:t>
-            </a:fld>
-            <a:endParaRPr kumimoji="0" lang="en-US" sz="1200" b="0" i="0" u="none" strike="noStrike" kern="1200" cap="none" spc="0" normalizeH="0" baseline="0" noProof="0">
-              <a:ln>
-                <a:noFill/>
-              </a:ln>
-              <a:solidFill>
-                <a:prstClr val="black"/>
-              </a:solidFill>
-              <a:effectLst/>
-              <a:uLnTx/>
-              <a:uFillTx/>
-              <a:latin typeface="Calibri" pitchFamily="34" charset="0"/>
-              <a:ea typeface="ＭＳ Ｐゴシック" pitchFamily="1" charset="-128"/>
-              <a:cs typeface="+mn-cs"/>
-            </a:endParaRPr>
-          </a:p>
-        </p:txBody>
-      </p:sp>
-    </p:spTree>
-    <p:extLst>
-      <p:ext uri="{BB962C8B-B14F-4D97-AF65-F5344CB8AC3E}">
-        <p14:creationId xmlns:p14="http://schemas.microsoft.com/office/powerpoint/2010/main" val="3783576877"/>
-      </p:ext>
-    </p:extLst>
-  </p:cSld>
-  <p:clrMapOvr>
-    <a:masterClrMapping/>
-  </p:clrMapOvr>
-</p:notes>
-</file>
-
 <file path=ppt/slideLayouts/slideLayout1.xml><?xml version="1.0" encoding="utf-8"?>
 <p:sldLayout xmlns:a="http://schemas.openxmlformats.org/drawingml/2006/main" xmlns:r="http://schemas.openxmlformats.org/officeDocument/2006/relationships" xmlns:p="http://schemas.openxmlformats.org/presentationml/2006/main" type="title" preserve="1">
   <p:cSld name="Title Slide">
@@ -1713,7 +1534,7 @@
           <a:p>
             <a:fld id="{E60792E3-D524-454C-8AFD-A91972900BCB}" type="datetime1">
               <a:rPr lang="en-US" smtClean="0"/>
-              <a:t>6/2/2026</a:t>
+              <a:t>9/2/2026</a:t>
             </a:fld>
             <a:endParaRPr lang="en-US"/>
           </a:p>
@@ -1895,7 +1716,7 @@
           <a:p>
             <a:fld id="{053C3A68-6922-42D3-8905-ECC2D82A3469}" type="datetime1">
               <a:rPr lang="en-US" smtClean="0"/>
-              <a:t>6/2/2026</a:t>
+              <a:t>9/2/2026</a:t>
             </a:fld>
             <a:endParaRPr lang="en-US"/>
           </a:p>
@@ -2087,7 +1908,7 @@
           <a:p>
             <a:fld id="{CB69E9F4-7604-4950-A8B2-8ACDEDB1506E}" type="datetime1">
               <a:rPr lang="en-US" smtClean="0"/>
-              <a:t>6/2/2026</a:t>
+              <a:t>9/2/2026</a:t>
             </a:fld>
             <a:endParaRPr lang="en-US"/>
           </a:p>
@@ -2269,7 +2090,7 @@
           <a:p>
             <a:fld id="{708B7524-32A2-4C20-A58C-BC3BAA1042FC}" type="datetime1">
               <a:rPr lang="en-US" smtClean="0"/>
-              <a:t>6/2/2026</a:t>
+              <a:t>9/2/2026</a:t>
             </a:fld>
             <a:endParaRPr lang="en-US"/>
           </a:p>
@@ -2528,7 +2349,7 @@
           <a:p>
             <a:fld id="{1E994447-D6B2-43BB-A877-57F1A267B999}" type="datetime1">
               <a:rPr lang="en-US" smtClean="0"/>
-              <a:t>6/2/2026</a:t>
+              <a:t>9/2/2026</a:t>
             </a:fld>
             <a:endParaRPr lang="en-US"/>
           </a:p>
@@ -2827,7 +2648,7 @@
           <a:p>
             <a:fld id="{68920E16-BD35-483C-AA6B-346FC7E46DEA}" type="datetime1">
               <a:rPr lang="en-US" smtClean="0"/>
-              <a:t>6/2/2026</a:t>
+              <a:t>9/2/2026</a:t>
             </a:fld>
             <a:endParaRPr lang="en-US"/>
           </a:p>
@@ -3260,7 +3081,7 @@
           <a:p>
             <a:fld id="{2FEAC6F8-5103-4FC0-A69E-5C6AE6469DA8}" type="datetime1">
               <a:rPr lang="en-US" smtClean="0"/>
-              <a:t>6/2/2026</a:t>
+              <a:t>9/2/2026</a:t>
             </a:fld>
             <a:endParaRPr lang="en-US"/>
           </a:p>
@@ -3391,7 +3212,7 @@
           <a:p>
             <a:fld id="{C60C6921-0627-4C8F-83D5-0CF936D2FFDD}" type="datetime1">
               <a:rPr lang="en-US" smtClean="0"/>
-              <a:t>6/2/2026</a:t>
+              <a:t>9/2/2026</a:t>
             </a:fld>
             <a:endParaRPr lang="en-US"/>
           </a:p>
@@ -3500,7 +3321,7 @@
           <a:p>
             <a:fld id="{2FF08AD7-8103-40F8-983C-E2BA6BB9CBE0}" type="datetime1">
               <a:rPr lang="en-US" smtClean="0"/>
-              <a:t>6/2/2026</a:t>
+              <a:t>9/2/2026</a:t>
             </a:fld>
             <a:endParaRPr lang="en-US"/>
           </a:p>
@@ -3789,7 +3610,7 @@
           <a:p>
             <a:fld id="{DF8C06B4-9380-4A4D-AF49-A3596E17DAF5}" type="datetime1">
               <a:rPr lang="en-US" smtClean="0"/>
-              <a:t>6/2/2026</a:t>
+              <a:t>9/2/2026</a:t>
             </a:fld>
             <a:endParaRPr lang="en-US"/>
           </a:p>
@@ -4058,7 +3879,7 @@
           <a:p>
             <a:fld id="{EF7FDEF1-C582-4E22-9E77-D68326471F28}" type="datetime1">
               <a:rPr lang="en-US" smtClean="0"/>
-              <a:t>6/2/2026</a:t>
+              <a:t>9/2/2026</a:t>
             </a:fld>
             <a:endParaRPr lang="en-US"/>
           </a:p>
@@ -4301,7 +4122,7 @@
           <a:p>
             <a:fld id="{780A9602-A9A9-453F-AEF1-37B5837E02CD}" type="datetime1">
               <a:rPr lang="en-US" smtClean="0"/>
-              <a:t>6/2/2026</a:t>
+              <a:t>9/2/2026</a:t>
             </a:fld>
             <a:endParaRPr lang="en-US"/>
           </a:p>
@@ -4852,7 +4673,7 @@
                 <a16:creationId xmlns:a16="http://schemas.microsoft.com/office/drawing/2014/main" id="{3E443FD7-A66B-4AA0-872D-B088B9BC5F17}"/>
               </a:ext>
               <a:ext uri="{C183D7F6-B498-43B3-948B-1728B52AA6E4}">
-                <adec:decorative xmlns:adec="http://schemas.microsoft.com/office/drawing/2017/decorative" xmlns="" val="1"/>
+                <adec:decorative xmlns:adec="http://schemas.microsoft.com/office/drawing/2017/decorative" val="1"/>
               </a:ext>
             </a:extLst>
           </p:cNvPr>
@@ -4912,7 +4733,7 @@
                 <a16:creationId xmlns:a16="http://schemas.microsoft.com/office/drawing/2014/main" id="{C04BE0EF-3561-49B4-9A29-F283168A91C7}"/>
               </a:ext>
               <a:ext uri="{C183D7F6-B498-43B3-948B-1728B52AA6E4}">
-                <adec:decorative xmlns:adec="http://schemas.microsoft.com/office/drawing/2017/decorative" xmlns="" val="1"/>
+                <adec:decorative xmlns:adec="http://schemas.microsoft.com/office/drawing/2017/decorative" val="1"/>
               </a:ext>
             </a:extLst>
           </p:cNvPr>
@@ -5727,15 +5548,6 @@
           <a:bodyPr/>
           <a:lstStyle/>
           <a:p>
-            <a:endParaRPr lang="en-US" b="1" dirty="0">
-              <a:solidFill>
-                <a:schemeClr val="tx1"/>
-              </a:solidFill>
-              <a:latin typeface="Times New Roman" panose="02020603050405020304" pitchFamily="18" charset="0"/>
-              <a:cs typeface="Times New Roman" panose="02020603050405020304" pitchFamily="18" charset="0"/>
-            </a:endParaRPr>
-          </a:p>
-          <a:p>
             <a:r>
               <a:rPr lang="en-US" b="1" dirty="0">
                 <a:solidFill>
@@ -5744,7 +5556,7 @@
                 <a:latin typeface="Times New Roman" panose="02020603050405020304" pitchFamily="18" charset="0"/>
                 <a:cs typeface="Times New Roman" panose="02020603050405020304" pitchFamily="18" charset="0"/>
               </a:rPr>
-              <a:t>TITLE PAGE</a:t>
+              <a:t>Hallucination-Resistant Multimodal Socratic Tutor</a:t>
             </a:r>
             <a:endParaRPr lang="en-IN" b="1" dirty="0">
               <a:solidFill>
@@ -5783,16 +5595,7 @@
                 </a:solidFill>
                 <a:latin typeface="Garamond" panose="02020404030301010803" pitchFamily="18" charset="0"/>
               </a:rPr>
-              <a:t>SMART INDIA HACKATHON </a:t>
-            </a:r>
-            <a:r>
-              <a:rPr lang="en-US" sz="4000" b="1" dirty="0" smtClean="0">
-                <a:solidFill>
-                  <a:schemeClr val="tx2"/>
-                </a:solidFill>
-                <a:latin typeface="Garamond" panose="02020404030301010803" pitchFamily="18" charset="0"/>
-              </a:rPr>
-              <a:t>2026</a:t>
+              <a:t>SMART INDIA HACKATHON 2026</a:t>
             </a:r>
             <a:endParaRPr lang="en-IN" sz="4000" b="1" dirty="0">
               <a:solidFill>
@@ -5812,7 +5615,7 @@
         <p:spPr>
           <a:xfrm>
             <a:off x="331286" y="2076450"/>
-            <a:ext cx="5924550" cy="4703019"/>
+            <a:ext cx="5924550" cy="4378891"/>
           </a:xfrm>
           <a:prstGeom prst="rect">
             <a:avLst/>
@@ -5826,6 +5629,54 @@
           <a:lstStyle/>
           <a:p>
             <a:endParaRPr lang="en-US" dirty="0"/>
+          </a:p>
+          <a:p>
+            <a:pPr marL="285750" indent="-285750" algn="just">
+              <a:lnSpc>
+                <a:spcPct val="100000"/>
+              </a:lnSpc>
+              <a:buFont typeface="Arial" panose="020B0604020202020204" pitchFamily="34" charset="0"/>
+              <a:buChar char="•"/>
+            </a:pPr>
+            <a:r>
+              <a:rPr lang="en-US" sz="2400" b="1" dirty="0">
+                <a:latin typeface="Arial" panose="020B0604020202020204" pitchFamily="34" charset="0"/>
+                <a:cs typeface="Arial" panose="020B0604020202020204" pitchFamily="34" charset="0"/>
+              </a:rPr>
+              <a:t>Problem Statement ID – </a:t>
+            </a:r>
+            <a:r>
+              <a:rPr lang="en-IN" sz="2400" dirty="0"/>
+              <a:t>SIH26207</a:t>
+            </a:r>
+            <a:endParaRPr lang="en-US" sz="2400" b="1" dirty="0">
+              <a:latin typeface="Arial" panose="020B0604020202020204" pitchFamily="34" charset="0"/>
+              <a:cs typeface="Arial" panose="020B0604020202020204" pitchFamily="34" charset="0"/>
+            </a:endParaRPr>
+          </a:p>
+          <a:p>
+            <a:pPr marL="285750" indent="-285750" algn="just">
+              <a:lnSpc>
+                <a:spcPct val="100000"/>
+              </a:lnSpc>
+              <a:buFont typeface="Arial" panose="020B0604020202020204" pitchFamily="34" charset="0"/>
+              <a:buChar char="•"/>
+            </a:pPr>
+            <a:r>
+              <a:rPr lang="en-US" sz="2400" b="1" dirty="0">
+                <a:latin typeface="Arial" panose="020B0604020202020204" pitchFamily="34" charset="0"/>
+                <a:cs typeface="Arial" panose="020B0604020202020204" pitchFamily="34" charset="0"/>
+              </a:rPr>
+              <a:t>Problem Statement Title- </a:t>
+            </a:r>
+            <a:r>
+              <a:rPr lang="en-IN" sz="2400" dirty="0"/>
+              <a:t>Student Innovation-Smart education</a:t>
+            </a:r>
+            <a:endParaRPr lang="en-US" sz="2400" b="1" dirty="0">
+              <a:latin typeface="Arial" panose="020B0604020202020204" pitchFamily="34" charset="0"/>
+              <a:cs typeface="Arial" panose="020B0604020202020204" pitchFamily="34" charset="0"/>
+            </a:endParaRPr>
           </a:p>
           <a:p>
             <a:pPr marL="285750" indent="-285750" algn="just">
@@ -5840,7 +5691,7 @@
                 <a:latin typeface="Arial" panose="020B0604020202020204" pitchFamily="34" charset="0"/>
                 <a:cs typeface="Arial" panose="020B0604020202020204" pitchFamily="34" charset="0"/>
               </a:rPr>
-              <a:t>Problem Statement ID –</a:t>
+              <a:t>Theme- Smart Education</a:t>
             </a:r>
           </a:p>
           <a:p>
@@ -5856,7 +5707,7 @@
                 <a:latin typeface="Arial" panose="020B0604020202020204" pitchFamily="34" charset="0"/>
                 <a:cs typeface="Arial" panose="020B0604020202020204" pitchFamily="34" charset="0"/>
               </a:rPr>
-              <a:t>Problem Statement Title-</a:t>
+              <a:t>PS Category- Software</a:t>
             </a:r>
           </a:p>
           <a:p>
@@ -5872,7 +5723,7 @@
                 <a:latin typeface="Arial" panose="020B0604020202020204" pitchFamily="34" charset="0"/>
                 <a:cs typeface="Arial" panose="020B0604020202020204" pitchFamily="34" charset="0"/>
               </a:rPr>
-              <a:t>Theme-</a:t>
+              <a:t>Team ID-</a:t>
             </a:r>
           </a:p>
           <a:p>
@@ -5888,39 +5739,7 @@
                 <a:latin typeface="Arial" panose="020B0604020202020204" pitchFamily="34" charset="0"/>
                 <a:cs typeface="Arial" panose="020B0604020202020204" pitchFamily="34" charset="0"/>
               </a:rPr>
-              <a:t>PS Category- Software/Hardware</a:t>
-            </a:r>
-          </a:p>
-          <a:p>
-            <a:pPr marL="285750" indent="-285750" algn="just">
-              <a:lnSpc>
-                <a:spcPct val="200000"/>
-              </a:lnSpc>
-              <a:buFont typeface="Arial" panose="020B0604020202020204" pitchFamily="34" charset="0"/>
-              <a:buChar char="•"/>
-            </a:pPr>
-            <a:r>
-              <a:rPr lang="en-US" sz="2400" b="1" dirty="0">
-                <a:latin typeface="Arial" panose="020B0604020202020204" pitchFamily="34" charset="0"/>
-                <a:cs typeface="Arial" panose="020B0604020202020204" pitchFamily="34" charset="0"/>
-              </a:rPr>
-              <a:t>Team ID-</a:t>
-            </a:r>
-          </a:p>
-          <a:p>
-            <a:pPr marL="285750" indent="-285750" algn="just">
-              <a:lnSpc>
-                <a:spcPct val="200000"/>
-              </a:lnSpc>
-              <a:buFont typeface="Arial" panose="020B0604020202020204" pitchFamily="34" charset="0"/>
-              <a:buChar char="•"/>
-            </a:pPr>
-            <a:r>
-              <a:rPr lang="en-US" sz="2400" b="1" dirty="0">
-                <a:latin typeface="Arial" panose="020B0604020202020204" pitchFamily="34" charset="0"/>
-                <a:cs typeface="Arial" panose="020B0604020202020204" pitchFamily="34" charset="0"/>
-              </a:rPr>
-              <a:t>Team Name (Registered on portal)</a:t>
+              <a:t>Team Name – Jura Tempest</a:t>
             </a:r>
             <a:endParaRPr lang="en-IN" sz="2400" b="1" dirty="0">
               <a:latin typeface="Arial" panose="020B0604020202020204" pitchFamily="34" charset="0"/>
@@ -5986,6 +5805,558 @@
       </p:grpSpPr>
       <p:sp>
         <p:nvSpPr>
+          <p:cNvPr id="3" name="TextBox 2">
+            <a:extLst>
+              <a:ext uri="{FF2B5EF4-FFF2-40B4-BE49-F238E27FC236}">
+                <a16:creationId xmlns:a16="http://schemas.microsoft.com/office/drawing/2014/main" id="{28BEE199-1E4C-5193-1FED-05A71D9D8126}"/>
+              </a:ext>
+            </a:extLst>
+          </p:cNvPr>
+          <p:cNvSpPr txBox="1"/>
+          <p:nvPr/>
+        </p:nvSpPr>
+        <p:spPr>
+          <a:xfrm>
+            <a:off x="329771" y="1143000"/>
+            <a:ext cx="7533691" cy="5714385"/>
+          </a:xfrm>
+          <a:prstGeom prst="rect">
+            <a:avLst/>
+          </a:prstGeom>
+          <a:noFill/>
+        </p:spPr>
+        <p:txBody>
+          <a:bodyPr wrap="square">
+            <a:spAutoFit/>
+          </a:bodyPr>
+          <a:lstStyle/>
+          <a:p>
+            <a:pPr marL="457200" indent="-457200">
+              <a:buAutoNum type="arabicPeriod"/>
+            </a:pPr>
+            <a:r>
+              <a:rPr lang="en-US" b="1" u="sng" dirty="0">
+                <a:solidFill>
+                  <a:srgbClr val="0070C0"/>
+                </a:solidFill>
+              </a:rPr>
+              <a:t>Proposed Solution:</a:t>
+            </a:r>
+          </a:p>
+          <a:p>
+            <a:endParaRPr lang="en-US" sz="900" b="1" u="sng" dirty="0"/>
+          </a:p>
+          <a:p>
+            <a:r>
+              <a:rPr lang="en-US" sz="1200" b="1" dirty="0"/>
+              <a:t>Detailed Explanation:</a:t>
+            </a:r>
+          </a:p>
+          <a:p>
+            <a:pPr marL="205740" indent="-205740">
+              <a:spcBef>
+                <a:spcPts val="0"/>
+              </a:spcBef>
+              <a:spcAft>
+                <a:spcPts val="200"/>
+              </a:spcAft>
+              <a:buFont typeface="Arial" panose="020B0604020202020204" pitchFamily="34" charset="0"/>
+              <a:buChar char="•"/>
+            </a:pPr>
+            <a:r>
+              <a:rPr lang="en-US" sz="1100" dirty="0">
+                <a:solidFill>
+                  <a:srgbClr val="1A2434"/>
+                </a:solidFill>
+                <a:latin typeface="Arial" pitchFamily="34" charset="0"/>
+                <a:cs typeface="Arial" pitchFamily="34" charset="0"/>
+              </a:rPr>
+              <a:t>An offline doubt-solving tutor for students across different classes and subjects, grounded in a defined curriculum. </a:t>
+            </a:r>
+          </a:p>
+          <a:p>
+            <a:pPr marL="205740" indent="-205740">
+              <a:spcBef>
+                <a:spcPts val="0"/>
+              </a:spcBef>
+              <a:spcAft>
+                <a:spcPts val="200"/>
+              </a:spcAft>
+              <a:buFont typeface="Arial" panose="020B0604020202020204" pitchFamily="34" charset="0"/>
+              <a:buChar char="•"/>
+            </a:pPr>
+            <a:r>
+              <a:rPr lang="en-US" sz="1100" dirty="0">
+                <a:solidFill>
+                  <a:srgbClr val="1A2434"/>
+                </a:solidFill>
+                <a:latin typeface="Arial" pitchFamily="34" charset="0"/>
+                <a:cs typeface="Arial" pitchFamily="34" charset="0"/>
+              </a:rPr>
+              <a:t>The selected curriculum is transformed into a structured knowledge graph — from chapters to pages, sections and chunks — while preserving relevant figures. </a:t>
+            </a:r>
+          </a:p>
+          <a:p>
+            <a:pPr marL="205740" indent="-205740">
+              <a:spcBef>
+                <a:spcPts val="0"/>
+              </a:spcBef>
+              <a:spcAft>
+                <a:spcPts val="200"/>
+              </a:spcAft>
+              <a:buFont typeface="Arial" panose="020B0604020202020204" pitchFamily="34" charset="0"/>
+              <a:buChar char="•"/>
+            </a:pPr>
+            <a:r>
+              <a:rPr lang="en-US" sz="1100" dirty="0">
+                <a:solidFill>
+                  <a:srgbClr val="1A2434"/>
+                </a:solidFill>
+                <a:latin typeface="Arial" pitchFamily="34" charset="0"/>
+                <a:cs typeface="Arial" pitchFamily="34" charset="0"/>
+              </a:rPr>
+              <a:t>A student selects their class and subject, then types a doubt or uploads a photo of the question. </a:t>
+            </a:r>
+          </a:p>
+          <a:p>
+            <a:pPr marL="205740" indent="-205740">
+              <a:spcBef>
+                <a:spcPts val="0"/>
+              </a:spcBef>
+              <a:spcAft>
+                <a:spcPts val="200"/>
+              </a:spcAft>
+              <a:buFont typeface="Arial" panose="020B0604020202020204" pitchFamily="34" charset="0"/>
+              <a:buChar char="•"/>
+            </a:pPr>
+            <a:r>
+              <a:rPr lang="en-US" sz="1100" dirty="0">
+                <a:solidFill>
+                  <a:srgbClr val="1A2434"/>
+                </a:solidFill>
+                <a:latin typeface="Arial" pitchFamily="34" charset="0"/>
+                <a:cs typeface="Arial" pitchFamily="34" charset="0"/>
+              </a:rPr>
+              <a:t>The system retrieves relevant data from the curriculum, checks whether the evidence is sufficient, and only then generates a response.</a:t>
+            </a:r>
+          </a:p>
+          <a:p>
+            <a:pPr>
+              <a:spcBef>
+                <a:spcPts val="0"/>
+              </a:spcBef>
+              <a:spcAft>
+                <a:spcPts val="200"/>
+              </a:spcAft>
+            </a:pPr>
+            <a:endParaRPr lang="en-US" sz="1100" dirty="0">
+              <a:solidFill>
+                <a:srgbClr val="1A2434"/>
+              </a:solidFill>
+              <a:latin typeface="Arial" pitchFamily="34" charset="0"/>
+              <a:cs typeface="Arial" pitchFamily="34" charset="0"/>
+            </a:endParaRPr>
+          </a:p>
+          <a:p>
+            <a:pPr>
+              <a:spcBef>
+                <a:spcPts val="0"/>
+              </a:spcBef>
+              <a:spcAft>
+                <a:spcPts val="200"/>
+              </a:spcAft>
+            </a:pPr>
+            <a:r>
+              <a:rPr lang="en-US" sz="1200" b="1" dirty="0">
+                <a:solidFill>
+                  <a:srgbClr val="1A2434"/>
+                </a:solidFill>
+                <a:latin typeface="+mj-lt"/>
+                <a:cs typeface="Arial" pitchFamily="34" charset="0"/>
+              </a:rPr>
+              <a:t>How it addresses the problem:</a:t>
+            </a:r>
+          </a:p>
+          <a:p>
+            <a:pPr marL="205740" indent="-205740">
+              <a:spcBef>
+                <a:spcPts val="0"/>
+              </a:spcBef>
+              <a:spcAft>
+                <a:spcPts val="200"/>
+              </a:spcAft>
+              <a:buFont typeface="Arial" panose="020B0604020202020204" pitchFamily="34" charset="0"/>
+              <a:buChar char="•"/>
+            </a:pPr>
+            <a:r>
+              <a:rPr lang="en-US" sz="1100" dirty="0">
+                <a:solidFill>
+                  <a:srgbClr val="1A2434"/>
+                </a:solidFill>
+                <a:latin typeface="Arial" pitchFamily="34" charset="0"/>
+                <a:cs typeface="Arial" pitchFamily="34" charset="0"/>
+              </a:rPr>
+              <a:t>Every reply is built from retrieved data, so it stays inside the syllabus and at the student’s own class level.</a:t>
+            </a:r>
+          </a:p>
+          <a:p>
+            <a:pPr marL="205740" indent="-205740">
+              <a:spcBef>
+                <a:spcPts val="0"/>
+              </a:spcBef>
+              <a:spcAft>
+                <a:spcPts val="200"/>
+              </a:spcAft>
+              <a:buFont typeface="Arial" panose="020B0604020202020204" pitchFamily="34" charset="0"/>
+              <a:buChar char="•"/>
+            </a:pPr>
+            <a:r>
+              <a:rPr lang="en-US" sz="1100" dirty="0">
+                <a:solidFill>
+                  <a:srgbClr val="1A2434"/>
+                </a:solidFill>
+                <a:latin typeface="Arial" pitchFamily="34" charset="0"/>
+                <a:cs typeface="Arial" pitchFamily="34" charset="0"/>
+              </a:rPr>
+              <a:t>If the book does not back the doubt, the tutor says so instead of inventing an answer.</a:t>
+            </a:r>
+          </a:p>
+          <a:p>
+            <a:pPr marL="205740" indent="-205740">
+              <a:spcBef>
+                <a:spcPts val="0"/>
+              </a:spcBef>
+              <a:spcAft>
+                <a:spcPts val="200"/>
+              </a:spcAft>
+              <a:buFont typeface="Arial" panose="020B0604020202020204" pitchFamily="34" charset="0"/>
+              <a:buChar char="•"/>
+            </a:pPr>
+            <a:r>
+              <a:rPr lang="en-US" sz="1100" dirty="0">
+                <a:solidFill>
+                  <a:srgbClr val="1A2434"/>
+                </a:solidFill>
+                <a:latin typeface="Arial" pitchFamily="34" charset="0"/>
+                <a:cs typeface="Arial" pitchFamily="34" charset="0"/>
+              </a:rPr>
+              <a:t>A teacher can open the dashboard and see exactly which data a reply came from.</a:t>
+            </a:r>
+          </a:p>
+          <a:p>
+            <a:pPr>
+              <a:spcBef>
+                <a:spcPts val="0"/>
+              </a:spcBef>
+              <a:spcAft>
+                <a:spcPts val="200"/>
+              </a:spcAft>
+            </a:pPr>
+            <a:endParaRPr lang="en-US" sz="1100" dirty="0">
+              <a:solidFill>
+                <a:srgbClr val="1A2434"/>
+              </a:solidFill>
+              <a:latin typeface="Arial" pitchFamily="34" charset="0"/>
+              <a:cs typeface="Arial" pitchFamily="34" charset="0"/>
+            </a:endParaRPr>
+          </a:p>
+          <a:p>
+            <a:pPr>
+              <a:spcBef>
+                <a:spcPts val="0"/>
+              </a:spcBef>
+              <a:spcAft>
+                <a:spcPts val="200"/>
+              </a:spcAft>
+            </a:pPr>
+            <a:r>
+              <a:rPr lang="en-US" sz="1200" b="1" dirty="0">
+                <a:solidFill>
+                  <a:srgbClr val="1A2434"/>
+                </a:solidFill>
+                <a:latin typeface="+mj-lt"/>
+                <a:cs typeface="Arial" pitchFamily="34" charset="0"/>
+              </a:rPr>
+              <a:t>Innovation and uniqueness of the solution:</a:t>
+            </a:r>
+          </a:p>
+          <a:p>
+            <a:pPr marL="205740" indent="-205740">
+              <a:spcBef>
+                <a:spcPts val="0"/>
+              </a:spcBef>
+              <a:spcAft>
+                <a:spcPts val="200"/>
+              </a:spcAft>
+              <a:buFont typeface="Arial" panose="020B0604020202020204" pitchFamily="34" charset="0"/>
+              <a:buChar char="•"/>
+            </a:pPr>
+            <a:r>
+              <a:rPr lang="en-US" sz="1100" dirty="0">
+                <a:solidFill>
+                  <a:srgbClr val="1A2434"/>
+                </a:solidFill>
+                <a:latin typeface="Arial" pitchFamily="34" charset="0"/>
+                <a:cs typeface="Arial" pitchFamily="34" charset="0"/>
+              </a:rPr>
+              <a:t>It teaches instead of answering: one hint and one guiding question, with separate modes to explain a concept or check the student’s own attempt.</a:t>
+            </a:r>
+          </a:p>
+          <a:p>
+            <a:pPr marL="205740" indent="-205740">
+              <a:spcBef>
+                <a:spcPts val="0"/>
+              </a:spcBef>
+              <a:spcAft>
+                <a:spcPts val="200"/>
+              </a:spcAft>
+              <a:buFont typeface="Arial" panose="020B0604020202020204" pitchFamily="34" charset="0"/>
+              <a:buChar char="•"/>
+            </a:pPr>
+            <a:r>
+              <a:rPr lang="en-US" sz="1100" dirty="0">
+                <a:solidFill>
+                  <a:srgbClr val="1A2434"/>
+                </a:solidFill>
+                <a:latin typeface="Arial" pitchFamily="34" charset="0"/>
+                <a:cs typeface="Arial" pitchFamily="34" charset="0"/>
+              </a:rPr>
+              <a:t>Before answering, the system checks whether the retrieved evidence is relevant and strong enough; otherwise, it stops rather than generate an unsupported response.</a:t>
+            </a:r>
+          </a:p>
+          <a:p>
+            <a:pPr marL="205740" indent="-205740">
+              <a:spcBef>
+                <a:spcPts val="0"/>
+              </a:spcBef>
+              <a:spcAft>
+                <a:spcPts val="200"/>
+              </a:spcAft>
+              <a:buFont typeface="Arial" panose="020B0604020202020204" pitchFamily="34" charset="0"/>
+              <a:buChar char="•"/>
+            </a:pPr>
+            <a:r>
+              <a:rPr lang="en-US" sz="1100" dirty="0">
+                <a:solidFill>
+                  <a:srgbClr val="1A2434"/>
+                </a:solidFill>
+                <a:latin typeface="Arial" pitchFamily="34" charset="0"/>
+                <a:cs typeface="Arial" pitchFamily="34" charset="0"/>
+              </a:rPr>
+              <a:t>One database does all three searches — meaning, exact words and chapter structure — merged by weighted Reciprocal Rank Fusion.</a:t>
+            </a:r>
+          </a:p>
+          <a:p>
+            <a:pPr>
+              <a:spcBef>
+                <a:spcPts val="0"/>
+              </a:spcBef>
+              <a:spcAft>
+                <a:spcPts val="200"/>
+              </a:spcAft>
+            </a:pPr>
+            <a:r>
+              <a:rPr lang="en-US" sz="1100" dirty="0">
+                <a:solidFill>
+                  <a:srgbClr val="1A2434"/>
+                </a:solidFill>
+                <a:latin typeface="Arial" pitchFamily="34" charset="0"/>
+                <a:cs typeface="Arial" pitchFamily="34" charset="0"/>
+              </a:rPr>
+              <a:t>	Weighted Reciprocal Rank Fusion : score(chunk) = (Σ for all channels) </a:t>
+            </a:r>
+            <a:r>
+              <a:rPr lang="en-US" sz="1100" dirty="0" err="1">
+                <a:solidFill>
+                  <a:srgbClr val="1A2434"/>
+                </a:solidFill>
+                <a:latin typeface="Arial" pitchFamily="34" charset="0"/>
+                <a:cs typeface="Arial" pitchFamily="34" charset="0"/>
+              </a:rPr>
+              <a:t>weight_channel</a:t>
+            </a:r>
+            <a:r>
+              <a:rPr lang="en-US" sz="1100" dirty="0">
+                <a:solidFill>
+                  <a:srgbClr val="1A2434"/>
+                </a:solidFill>
+                <a:latin typeface="Arial" pitchFamily="34" charset="0"/>
+                <a:cs typeface="Arial" pitchFamily="34" charset="0"/>
+              </a:rPr>
+              <a:t> / (k + </a:t>
+            </a:r>
+            <a:r>
+              <a:rPr lang="en-US" sz="1100" dirty="0" err="1">
+                <a:solidFill>
+                  <a:srgbClr val="1A2434"/>
+                </a:solidFill>
+                <a:latin typeface="Arial" pitchFamily="34" charset="0"/>
+                <a:cs typeface="Arial" pitchFamily="34" charset="0"/>
+              </a:rPr>
+              <a:t>rank_channel</a:t>
+            </a:r>
+            <a:r>
+              <a:rPr lang="en-US" sz="1100" dirty="0">
+                <a:solidFill>
+                  <a:srgbClr val="1A2434"/>
+                </a:solidFill>
+                <a:latin typeface="Arial" pitchFamily="34" charset="0"/>
+                <a:cs typeface="Arial" pitchFamily="34" charset="0"/>
+              </a:rPr>
+              <a:t>)</a:t>
+            </a:r>
+          </a:p>
+          <a:p>
+            <a:pPr marL="205740" indent="-205740">
+              <a:spcBef>
+                <a:spcPts val="0"/>
+              </a:spcBef>
+              <a:spcAft>
+                <a:spcPts val="200"/>
+              </a:spcAft>
+              <a:buFont typeface="Arial" panose="020B0604020202020204" pitchFamily="34" charset="0"/>
+              <a:buChar char="•"/>
+            </a:pPr>
+            <a:r>
+              <a:rPr lang="en-US" sz="1100" dirty="0">
+                <a:solidFill>
+                  <a:srgbClr val="1A2434"/>
+                </a:solidFill>
+                <a:latin typeface="Arial" pitchFamily="34" charset="0"/>
+                <a:cs typeface="Arial" pitchFamily="34" charset="0"/>
+              </a:rPr>
+              <a:t>Retrieval is class-aware: this class and lower classes only, never above.</a:t>
+            </a:r>
+          </a:p>
+          <a:p>
+            <a:pPr marL="205740" indent="-205740">
+              <a:spcBef>
+                <a:spcPts val="0"/>
+              </a:spcBef>
+              <a:spcAft>
+                <a:spcPts val="200"/>
+              </a:spcAft>
+              <a:buFont typeface="Arial" panose="020B0604020202020204" pitchFamily="34" charset="0"/>
+              <a:buChar char="•"/>
+            </a:pPr>
+            <a:r>
+              <a:rPr lang="en-US" sz="1100" dirty="0" err="1">
+                <a:solidFill>
+                  <a:srgbClr val="1A2434"/>
+                </a:solidFill>
+                <a:latin typeface="Arial" pitchFamily="34" charset="0"/>
+                <a:cs typeface="Arial" pitchFamily="34" charset="0"/>
+              </a:rPr>
+              <a:t>Maths</a:t>
+            </a:r>
+            <a:r>
+              <a:rPr lang="en-US" sz="1100" dirty="0">
+                <a:solidFill>
+                  <a:srgbClr val="1A2434"/>
+                </a:solidFill>
+                <a:latin typeface="Arial" pitchFamily="34" charset="0"/>
+                <a:cs typeface="Arial" pitchFamily="34" charset="0"/>
+              </a:rPr>
+              <a:t>-based “is my answer right?” checks are verified with </a:t>
+            </a:r>
+            <a:r>
+              <a:rPr lang="en-US" sz="1100" dirty="0" err="1">
+                <a:solidFill>
+                  <a:srgbClr val="1A2434"/>
+                </a:solidFill>
+                <a:latin typeface="Arial" pitchFamily="34" charset="0"/>
+                <a:cs typeface="Arial" pitchFamily="34" charset="0"/>
+              </a:rPr>
+              <a:t>SymPy</a:t>
+            </a:r>
+            <a:r>
+              <a:rPr lang="en-US" sz="1100" dirty="0">
+                <a:solidFill>
+                  <a:srgbClr val="1A2434"/>
+                </a:solidFill>
+                <a:latin typeface="Arial" pitchFamily="34" charset="0"/>
+                <a:cs typeface="Arial" pitchFamily="34" charset="0"/>
+              </a:rPr>
+              <a:t>, not left to the model.</a:t>
+            </a:r>
+          </a:p>
+          <a:p>
+            <a:pPr marL="205740" indent="-205740">
+              <a:spcBef>
+                <a:spcPts val="0"/>
+              </a:spcBef>
+              <a:spcAft>
+                <a:spcPts val="200"/>
+              </a:spcAft>
+              <a:buFont typeface="Arial" panose="020B0604020202020204" pitchFamily="34" charset="0"/>
+              <a:buChar char="•"/>
+            </a:pPr>
+            <a:r>
+              <a:rPr lang="en-US" sz="1100" dirty="0">
+                <a:solidFill>
+                  <a:srgbClr val="1A2434"/>
+                </a:solidFill>
+                <a:latin typeface="Arial" pitchFamily="34" charset="0"/>
+                <a:cs typeface="Arial" pitchFamily="34" charset="0"/>
+              </a:rPr>
+              <a:t>Everything runs on one machine, and student photos are deleted after the query.</a:t>
+            </a:r>
+          </a:p>
+          <a:p>
+            <a:pPr>
+              <a:spcBef>
+                <a:spcPts val="0"/>
+              </a:spcBef>
+              <a:spcAft>
+                <a:spcPts val="200"/>
+              </a:spcAft>
+            </a:pPr>
+            <a:endParaRPr lang="en-US" sz="1200" b="1" dirty="0">
+              <a:solidFill>
+                <a:srgbClr val="1A2434"/>
+              </a:solidFill>
+              <a:latin typeface="+mj-lt"/>
+              <a:cs typeface="Arial" pitchFamily="34" charset="0"/>
+            </a:endParaRPr>
+          </a:p>
+          <a:p>
+            <a:pPr>
+              <a:spcBef>
+                <a:spcPts val="0"/>
+              </a:spcBef>
+              <a:spcAft>
+                <a:spcPts val="200"/>
+              </a:spcAft>
+            </a:pPr>
+            <a:endParaRPr lang="en-US" sz="1200" b="1" dirty="0">
+              <a:solidFill>
+                <a:srgbClr val="1A2434"/>
+              </a:solidFill>
+              <a:latin typeface="+mj-lt"/>
+              <a:cs typeface="Arial" pitchFamily="34" charset="0"/>
+            </a:endParaRPr>
+          </a:p>
+          <a:p>
+            <a:pPr>
+              <a:spcBef>
+                <a:spcPts val="0"/>
+              </a:spcBef>
+              <a:spcAft>
+                <a:spcPts val="200"/>
+              </a:spcAft>
+            </a:pPr>
+            <a:endParaRPr lang="en-US" sz="1400" b="1" dirty="0">
+              <a:solidFill>
+                <a:srgbClr val="1A2434"/>
+              </a:solidFill>
+              <a:latin typeface="Arial" pitchFamily="34" charset="0"/>
+              <a:cs typeface="Arial" pitchFamily="34" charset="0"/>
+            </a:endParaRPr>
+          </a:p>
+        </p:txBody>
+      </p:sp>
+      <p:sp>
+        <p:nvSpPr>
           <p:cNvPr id="9" name="Rectangle 8"/>
           <p:cNvSpPr>
             <a:spLocks noChangeArrowheads="1"/>
@@ -6063,14 +6434,6 @@
           <a:lstStyle/>
           <a:p>
             <a:pPr eaLnBrk="1" hangingPunct="1"/>
-            <a:r>
-              <a:rPr lang="en-US" sz="3600" b="1" dirty="0">
-                <a:latin typeface="Times New Roman" panose="02020603050405020304" pitchFamily="18" charset="0"/>
-                <a:ea typeface="ＭＳ Ｐゴシック" pitchFamily="1" charset="-128"/>
-                <a:cs typeface="Times New Roman" panose="02020603050405020304" pitchFamily="18" charset="0"/>
-              </a:rPr>
-              <a:t/>
-            </a:r>
             <a:br>
               <a:rPr lang="en-US" sz="3600" b="1" dirty="0">
                 <a:latin typeface="Times New Roman" panose="02020603050405020304" pitchFamily="18" charset="0"/>
@@ -6085,125 +6448,6 @@
                 <a:cs typeface="Times New Roman" panose="02020603050405020304" pitchFamily="18" charset="0"/>
               </a:rPr>
               <a:t>IDEA TITLE</a:t>
-            </a:r>
-          </a:p>
-        </p:txBody>
-      </p:sp>
-      <p:sp>
-        <p:nvSpPr>
-          <p:cNvPr id="15362" name="TextBox 8"/>
-          <p:cNvSpPr txBox="1">
-            <a:spLocks noChangeArrowheads="1"/>
-          </p:cNvSpPr>
-          <p:nvPr/>
-        </p:nvSpPr>
-        <p:spPr bwMode="auto">
-          <a:xfrm>
-            <a:off x="-1" y="2064921"/>
-            <a:ext cx="12191999" cy="2492990"/>
-          </a:xfrm>
-          <a:prstGeom prst="rect">
-            <a:avLst/>
-          </a:prstGeom>
-          <a:noFill/>
-          <a:ln w="9525">
-            <a:noFill/>
-            <a:miter lim="800000"/>
-            <a:headEnd/>
-            <a:tailEnd/>
-          </a:ln>
-        </p:spPr>
-        <p:txBody>
-          <a:bodyPr wrap="square">
-            <a:spAutoFit/>
-          </a:bodyPr>
-          <a:lstStyle/>
-          <a:p>
-            <a:pPr marL="342900" indent="-342900">
-              <a:buFont typeface="Wingdings" panose="05000000000000000000" pitchFamily="2" charset="2"/>
-              <a:buChar char="v"/>
-            </a:pPr>
-            <a:r>
-              <a:rPr lang="en-US" sz="3200" b="1" u="sng" dirty="0">
-                <a:solidFill>
-                  <a:schemeClr val="tx2"/>
-                </a:solidFill>
-                <a:latin typeface="Arial" pitchFamily="34" charset="0"/>
-                <a:cs typeface="Arial" pitchFamily="34" charset="0"/>
-              </a:rPr>
-              <a:t>Proposed Solution (Describe your Idea/Solution/Prototype)</a:t>
-            </a:r>
-            <a:endParaRPr lang="en-US" sz="3200" u="sng" dirty="0">
-              <a:solidFill>
-                <a:schemeClr val="tx2"/>
-              </a:solidFill>
-              <a:latin typeface="Arial" pitchFamily="34" charset="0"/>
-              <a:cs typeface="Arial" pitchFamily="34" charset="0"/>
-            </a:endParaRPr>
-          </a:p>
-          <a:p>
-            <a:pPr marL="342900" indent="-342900">
-              <a:buFont typeface="Arial" panose="020B0604020202020204" pitchFamily="34" charset="0"/>
-              <a:buChar char="•"/>
-            </a:pPr>
-            <a:endParaRPr lang="en-US" sz="2000" u="sng" dirty="0">
-              <a:solidFill>
-                <a:schemeClr val="tx2"/>
-              </a:solidFill>
-              <a:latin typeface="Arial" pitchFamily="34" charset="0"/>
-              <a:cs typeface="Arial" pitchFamily="34" charset="0"/>
-            </a:endParaRPr>
-          </a:p>
-          <a:p>
-            <a:pPr marL="342900" indent="-342900">
-              <a:buFont typeface="Arial" panose="020B0604020202020204" pitchFamily="34" charset="0"/>
-              <a:buChar char="•"/>
-            </a:pPr>
-            <a:endParaRPr lang="en-US" sz="2000" u="sng" dirty="0">
-              <a:solidFill>
-                <a:schemeClr val="tx2"/>
-              </a:solidFill>
-              <a:latin typeface="Arial" pitchFamily="34" charset="0"/>
-              <a:cs typeface="Arial" pitchFamily="34" charset="0"/>
-            </a:endParaRPr>
-          </a:p>
-          <a:p>
-            <a:pPr marL="342900" indent="-342900" algn="just">
-              <a:buFont typeface="Arial" panose="020B0604020202020204" pitchFamily="34" charset="0"/>
-              <a:buChar char="•"/>
-            </a:pPr>
-            <a:r>
-              <a:rPr lang="en-US" sz="2800" dirty="0">
-                <a:latin typeface="Arial" pitchFamily="34" charset="0"/>
-                <a:cs typeface="Arial" pitchFamily="34" charset="0"/>
-              </a:rPr>
-              <a:t>Detailed explanation of the proposed solution</a:t>
-            </a:r>
-          </a:p>
-          <a:p>
-            <a:pPr marL="342900" indent="-342900" algn="just">
-              <a:buFont typeface="Arial" panose="020B0604020202020204" pitchFamily="34" charset="0"/>
-              <a:buChar char="•"/>
-            </a:pPr>
-            <a:r>
-              <a:rPr lang="en-US" sz="2800" dirty="0">
-                <a:latin typeface="Arial" pitchFamily="34" charset="0"/>
-                <a:cs typeface="Arial" pitchFamily="34" charset="0"/>
-              </a:rPr>
-              <a:t> How it addresses the problem</a:t>
-            </a:r>
-          </a:p>
-          <a:p>
-            <a:pPr marL="342900" indent="-342900" algn="just">
-              <a:buFont typeface="Arial" panose="020B0604020202020204" pitchFamily="34" charset="0"/>
-              <a:buChar char="•"/>
-            </a:pPr>
-            <a:r>
-              <a:rPr lang="en-US" sz="2800" dirty="0">
-                <a:latin typeface="Arial" pitchFamily="34" charset="0"/>
-                <a:cs typeface="Arial" pitchFamily="34" charset="0"/>
-              </a:rPr>
-              <a:t>Innovation and uniqueness of the solution </a:t>
             </a:r>
           </a:p>
         </p:txBody>
@@ -6242,52 +6486,13 @@
       </p:sp>
       <p:sp>
         <p:nvSpPr>
-          <p:cNvPr id="7" name="Footer Placeholder 6"/>
-          <p:cNvSpPr>
-            <a:spLocks noGrp="1"/>
-          </p:cNvSpPr>
-          <p:nvPr>
-            <p:ph type="ftr" sz="quarter" idx="11"/>
-          </p:nvPr>
-        </p:nvSpPr>
-        <p:spPr>
-          <a:xfrm>
-            <a:off x="4648200" y="6356353"/>
-            <a:ext cx="3204000" cy="365125"/>
-          </a:xfrm>
-        </p:spPr>
-        <p:txBody>
-          <a:bodyPr/>
-          <a:lstStyle/>
-          <a:p>
-            <a:pPr>
-              <a:defRPr/>
-            </a:pPr>
-            <a:r>
-              <a:rPr lang="en-US">
-                <a:solidFill>
-                  <a:schemeClr val="bg1"/>
-                </a:solidFill>
-              </a:rPr>
-              <a:t>@SIH Idea submission- Template</a:t>
-            </a:r>
-            <a:endParaRPr lang="en-US" dirty="0">
-              <a:solidFill>
-                <a:schemeClr val="bg1"/>
-              </a:solidFill>
-            </a:endParaRPr>
-          </a:p>
-        </p:txBody>
-      </p:sp>
-      <p:sp>
-        <p:nvSpPr>
           <p:cNvPr id="10" name="Oval 9" descr="Your startup LOGO">
             <a:extLst>
               <a:ext uri="{FF2B5EF4-FFF2-40B4-BE49-F238E27FC236}">
                 <a16:creationId xmlns:a16="http://schemas.microsoft.com/office/drawing/2014/main" id="{5DBCE864-823D-4A13-9607-5DA1F0ED5FB8}"/>
               </a:ext>
               <a:ext uri="{C183D7F6-B498-43B3-948B-1728B52AA6E4}">
-                <adec:decorative xmlns:adec="http://schemas.microsoft.com/office/drawing/2017/decorative" xmlns="" val="0"/>
+                <adec:decorative xmlns:adec="http://schemas.microsoft.com/office/drawing/2017/decorative" val="0"/>
               </a:ext>
             </a:extLst>
           </p:cNvPr>
@@ -6323,10 +6528,17 @@
           <a:p>
             <a:pPr algn="ctr"/>
             <a:r>
-              <a:rPr lang="en-US" dirty="0"/>
-              <a:t>Your Team Name</a:t>
-            </a:r>
-            <a:endParaRPr lang="en-IN" dirty="0"/>
+              <a:rPr lang="en-US" sz="1600" dirty="0"/>
+              <a:t>Jura</a:t>
+            </a:r>
+          </a:p>
+          <a:p>
+            <a:pPr algn="ctr"/>
+            <a:r>
+              <a:rPr lang="en-US" sz="1600" dirty="0"/>
+              <a:t>Tempest</a:t>
+            </a:r>
+            <a:endParaRPr lang="en-IN" sz="1600" dirty="0"/>
           </a:p>
         </p:txBody>
       </p:sp>
@@ -6354,6 +6566,36 @@
           <a:xfrm>
             <a:off x="9780086" y="1500"/>
             <a:ext cx="2249850" cy="1062337"/>
+          </a:xfrm>
+          <a:prstGeom prst="rect">
+            <a:avLst/>
+          </a:prstGeom>
+        </p:spPr>
+      </p:pic>
+      <p:pic>
+        <p:nvPicPr>
+          <p:cNvPr id="5" name="Picture 4" descr="slide2-student-view.png">
+            <a:extLst>
+              <a:ext uri="{FF2B5EF4-FFF2-40B4-BE49-F238E27FC236}">
+                <a16:creationId xmlns:a16="http://schemas.microsoft.com/office/drawing/2014/main" id="{84A3A128-A845-E7A0-E17C-752C6D734212}"/>
+              </a:ext>
+            </a:extLst>
+          </p:cNvPr>
+          <p:cNvPicPr>
+            <a:picLocks noChangeAspect="1"/>
+          </p:cNvPicPr>
+          <p:nvPr/>
+        </p:nvPicPr>
+        <p:blipFill>
+          <a:blip r:embed="rId4"/>
+          <a:stretch>
+            <a:fillRect/>
+          </a:stretch>
+        </p:blipFill>
+        <p:spPr>
+          <a:xfrm>
+            <a:off x="7863462" y="1664499"/>
+            <a:ext cx="4189548" cy="4050501"/>
           </a:xfrm>
           <a:prstGeom prst="rect">
             <a:avLst/>
@@ -6387,6 +6629,215 @@
       </p:grpSpPr>
       <p:sp>
         <p:nvSpPr>
+          <p:cNvPr id="2" name="TextBox 1">
+            <a:extLst>
+              <a:ext uri="{FF2B5EF4-FFF2-40B4-BE49-F238E27FC236}">
+                <a16:creationId xmlns:a16="http://schemas.microsoft.com/office/drawing/2014/main" id="{A97DD787-EA70-9977-DC7B-75A3161F8CEE}"/>
+              </a:ext>
+            </a:extLst>
+          </p:cNvPr>
+          <p:cNvSpPr txBox="1"/>
+          <p:nvPr/>
+        </p:nvSpPr>
+        <p:spPr>
+          <a:xfrm>
+            <a:off x="527883" y="1195959"/>
+            <a:ext cx="6181344" cy="4708981"/>
+          </a:xfrm>
+          <a:prstGeom prst="rect">
+            <a:avLst/>
+          </a:prstGeom>
+          <a:noFill/>
+        </p:spPr>
+        <p:txBody>
+          <a:bodyPr wrap="square" rtlCol="0">
+            <a:spAutoFit/>
+          </a:bodyPr>
+          <a:lstStyle/>
+          <a:p>
+            <a:r>
+              <a:rPr lang="en-US" sz="1600" b="1" dirty="0">
+                <a:solidFill>
+                  <a:srgbClr val="0070C0"/>
+                </a:solidFill>
+              </a:rPr>
+              <a:t>2. Technologies Used:</a:t>
+            </a:r>
+          </a:p>
+          <a:p>
+            <a:r>
+              <a:rPr lang="en-AE" sz="1400" b="1" dirty="0"/>
+              <a:t>Data &amp; Retrieval:</a:t>
+            </a:r>
+            <a:r>
+              <a:rPr lang="en-AE" sz="1400" dirty="0"/>
+              <a:t> Python + </a:t>
+            </a:r>
+            <a:r>
+              <a:rPr lang="en-AE" sz="1400" dirty="0" err="1"/>
+              <a:t>PyMuPDF</a:t>
+            </a:r>
+            <a:r>
+              <a:rPr lang="en-AE" sz="1400" dirty="0"/>
+              <a:t> for NCERT parsing → hierarchical Document/Page/Section/Chunking → BGE-M3 embeddings → Neo4j Knowledge Graph with cosine Vector + Lucene Full-Text indexes → Hybrid Retrieval + Weighted RRF + BGE-Reranker-v2-m3.</a:t>
+            </a:r>
+            <a:br>
+              <a:rPr lang="en-AE" sz="1400" dirty="0"/>
+            </a:br>
+            <a:r>
+              <a:rPr lang="en-AE" sz="1400" b="1" dirty="0"/>
+              <a:t>AI &amp; Application:</a:t>
+            </a:r>
+            <a:r>
+              <a:rPr lang="en-AE" sz="1400" dirty="0"/>
+              <a:t> Qwen3-VL-2B for query rewriting/photo understanding + </a:t>
+            </a:r>
+            <a:r>
+              <a:rPr lang="en-AE" sz="1400" dirty="0" err="1"/>
+              <a:t>SigLIP</a:t>
+            </a:r>
+            <a:r>
+              <a:rPr lang="en-AE" sz="1400" dirty="0"/>
+              <a:t> for figure matching → Evidence Sufficiency Gate → Qwen3-VL-8B-Instruct for Socratic tutoring → </a:t>
+            </a:r>
+            <a:r>
+              <a:rPr lang="en-AE" sz="1400" dirty="0" err="1"/>
+              <a:t>FastAPI</a:t>
+            </a:r>
+            <a:r>
+              <a:rPr lang="en-AE" sz="1400" dirty="0"/>
+              <a:t> + React/Vite + </a:t>
+            </a:r>
+            <a:r>
+              <a:rPr lang="en-AE" sz="1400" dirty="0" err="1"/>
+              <a:t>Cytoscape</a:t>
+            </a:r>
+            <a:r>
+              <a:rPr lang="en-AE" sz="1400" dirty="0"/>
+              <a:t> for local observability → </a:t>
+            </a:r>
+            <a:r>
+              <a:rPr lang="en-AE" sz="1400" dirty="0" err="1"/>
+              <a:t>SymPy</a:t>
+            </a:r>
+            <a:r>
+              <a:rPr lang="en-AE" sz="1400" dirty="0"/>
+              <a:t> for mathematical verification. </a:t>
+            </a:r>
+          </a:p>
+          <a:p>
+            <a:endParaRPr lang="en-AE" sz="1400" dirty="0"/>
+          </a:p>
+          <a:p>
+            <a:endParaRPr lang="en-AE" sz="1400" dirty="0"/>
+          </a:p>
+          <a:p>
+            <a:r>
+              <a:rPr lang="en-AE" sz="1600" b="1" dirty="0">
+                <a:solidFill>
+                  <a:srgbClr val="0070C0"/>
+                </a:solidFill>
+              </a:rPr>
+              <a:t>3. Methodology:</a:t>
+            </a:r>
+          </a:p>
+          <a:p>
+            <a:pPr lvl="0"/>
+            <a:r>
+              <a:rPr lang="en-AE" sz="1400" b="1" dirty="0"/>
+              <a:t>NCERT Parsing:</a:t>
+            </a:r>
+            <a:r>
+              <a:rPr lang="en-AE" sz="1400" dirty="0"/>
+              <a:t> </a:t>
+            </a:r>
+            <a:r>
+              <a:rPr lang="en-AE" sz="1400" dirty="0" err="1"/>
+              <a:t>PyMuPDF</a:t>
+            </a:r>
+            <a:r>
+              <a:rPr lang="en-AE" sz="1400" dirty="0"/>
+              <a:t> → Document → Page → Section → Chunk </a:t>
+            </a:r>
+          </a:p>
+          <a:p>
+            <a:pPr lvl="0"/>
+            <a:r>
+              <a:rPr lang="en-AE" sz="1400" b="1" dirty="0"/>
+              <a:t>Knowledge Base:</a:t>
+            </a:r>
+            <a:r>
+              <a:rPr lang="en-AE" sz="1400" dirty="0"/>
+              <a:t> BGE-M3 embeddings → Neo4j Graph + Vector + Lucene indexes </a:t>
+            </a:r>
+          </a:p>
+          <a:p>
+            <a:pPr lvl="0"/>
+            <a:r>
+              <a:rPr lang="en-AE" sz="1400" b="1" dirty="0"/>
+              <a:t>Query Processing:</a:t>
+            </a:r>
+            <a:r>
+              <a:rPr lang="en-AE" sz="1400" dirty="0"/>
+              <a:t> Grade/Subject filtering → Qwen3-VL-2B rewrite → </a:t>
+            </a:r>
+            <a:r>
+              <a:rPr lang="en-AE" sz="1400" dirty="0" err="1"/>
+              <a:t>SigLIP</a:t>
+            </a:r>
+            <a:r>
+              <a:rPr lang="en-AE" sz="1400" dirty="0"/>
+              <a:t> for images </a:t>
+            </a:r>
+          </a:p>
+          <a:p>
+            <a:pPr lvl="0"/>
+            <a:r>
+              <a:rPr lang="en-AE" sz="1400" b="1" dirty="0"/>
+              <a:t>Hybrid Retrieval:</a:t>
+            </a:r>
+            <a:r>
+              <a:rPr lang="en-AE" sz="1400" dirty="0"/>
+              <a:t> Dense + Lexical + Graph + Figure retrieval → Weighted RRF </a:t>
+            </a:r>
+          </a:p>
+          <a:p>
+            <a:pPr lvl="0"/>
+            <a:r>
+              <a:rPr lang="en-AE" sz="1400" b="1" dirty="0"/>
+              <a:t>Evidence Check:</a:t>
+            </a:r>
+            <a:r>
+              <a:rPr lang="en-AE" sz="1400" dirty="0"/>
+              <a:t> BGE </a:t>
+            </a:r>
+            <a:r>
+              <a:rPr lang="en-AE" sz="1400" dirty="0" err="1"/>
+              <a:t>Reranker</a:t>
+            </a:r>
+            <a:r>
+              <a:rPr lang="en-AE" sz="1400" dirty="0"/>
+              <a:t> → Grade-aware selection → Evidence Sufficiency Gate </a:t>
+            </a:r>
+          </a:p>
+          <a:p>
+            <a:pPr lvl="0"/>
+            <a:r>
+              <a:rPr lang="en-AE" sz="1400" b="1" dirty="0"/>
+              <a:t>Tutoring:</a:t>
+            </a:r>
+            <a:r>
+              <a:rPr lang="en-AE" sz="1400" dirty="0"/>
+              <a:t> Qwen3-VL-8B → Structured &amp; validated Socratic response</a:t>
+            </a:r>
+          </a:p>
+          <a:p>
+            <a:endParaRPr lang="en-US" sz="1600" b="1" dirty="0"/>
+          </a:p>
+        </p:txBody>
+      </p:sp>
+      <p:sp>
+        <p:nvSpPr>
           <p:cNvPr id="10" name="Rectangle 9">
             <a:extLst>
               <a:ext uri="{FF2B5EF4-FFF2-40B4-BE49-F238E27FC236}">
@@ -6478,63 +6929,6 @@
       </p:sp>
       <p:sp>
         <p:nvSpPr>
-          <p:cNvPr id="17410" name="TextBox 8"/>
-          <p:cNvSpPr txBox="1">
-            <a:spLocks noChangeArrowheads="1"/>
-          </p:cNvSpPr>
-          <p:nvPr/>
-        </p:nvSpPr>
-        <p:spPr bwMode="auto">
-          <a:xfrm>
-            <a:off x="609600" y="2533653"/>
-            <a:ext cx="9385300" cy="1815882"/>
-          </a:xfrm>
-          <a:prstGeom prst="rect">
-            <a:avLst/>
-          </a:prstGeom>
-          <a:noFill/>
-          <a:ln w="9525">
-            <a:noFill/>
-            <a:miter lim="800000"/>
-            <a:headEnd/>
-            <a:tailEnd/>
-          </a:ln>
-        </p:spPr>
-        <p:txBody>
-          <a:bodyPr wrap="square">
-            <a:spAutoFit/>
-          </a:bodyPr>
-          <a:lstStyle/>
-          <a:p>
-            <a:pPr marL="342900" indent="-342900" algn="just">
-              <a:buFont typeface="Arial" panose="020B0604020202020204" pitchFamily="34" charset="0"/>
-              <a:buChar char="•"/>
-            </a:pPr>
-            <a:r>
-              <a:rPr lang="en-US" sz="2800" dirty="0">
-                <a:latin typeface="Arial" pitchFamily="34" charset="0"/>
-                <a:cs typeface="Arial" pitchFamily="34" charset="0"/>
-              </a:rPr>
-              <a:t>Technologies to be used (e.g. programming languages, frameworks, hardware)</a:t>
-            </a:r>
-          </a:p>
-          <a:p>
-            <a:pPr marL="342900" indent="-342900" algn="just">
-              <a:buFont typeface="Arial" panose="020B0604020202020204" pitchFamily="34" charset="0"/>
-              <a:buChar char="•"/>
-            </a:pPr>
-            <a:r>
-              <a:rPr lang="en-US" sz="2800" dirty="0">
-                <a:latin typeface="Arial" pitchFamily="34" charset="0"/>
-                <a:cs typeface="Arial" pitchFamily="34" charset="0"/>
-              </a:rPr>
-              <a:t>Methodology and process for implementation (Flow Charts/Images/ working prototype)</a:t>
-            </a:r>
-          </a:p>
-        </p:txBody>
-      </p:sp>
-      <p:sp>
-        <p:nvSpPr>
           <p:cNvPr id="6" name="Slide Number Placeholder 5"/>
           <p:cNvSpPr>
             <a:spLocks noGrp="1"/>
@@ -6567,52 +6961,13 @@
       </p:sp>
       <p:sp>
         <p:nvSpPr>
-          <p:cNvPr id="7" name="Footer Placeholder 6"/>
-          <p:cNvSpPr>
-            <a:spLocks noGrp="1"/>
-          </p:cNvSpPr>
-          <p:nvPr>
-            <p:ph type="ftr" sz="quarter" idx="11"/>
-          </p:nvPr>
-        </p:nvSpPr>
-        <p:spPr>
-          <a:xfrm>
-            <a:off x="4648200" y="6356353"/>
-            <a:ext cx="3204000" cy="365125"/>
-          </a:xfrm>
-        </p:spPr>
-        <p:txBody>
-          <a:bodyPr/>
-          <a:lstStyle/>
-          <a:p>
-            <a:pPr>
-              <a:defRPr/>
-            </a:pPr>
-            <a:r>
-              <a:rPr lang="en-US">
-                <a:solidFill>
-                  <a:schemeClr val="bg1"/>
-                </a:solidFill>
-              </a:rPr>
-              <a:t>@SIH Idea submission- Template</a:t>
-            </a:r>
-            <a:endParaRPr lang="en-US" dirty="0">
-              <a:solidFill>
-                <a:schemeClr val="bg1"/>
-              </a:solidFill>
-            </a:endParaRPr>
-          </a:p>
-        </p:txBody>
-      </p:sp>
-      <p:sp>
-        <p:nvSpPr>
           <p:cNvPr id="11" name="Oval 10" descr="Your startup LOGO">
             <a:extLst>
               <a:ext uri="{FF2B5EF4-FFF2-40B4-BE49-F238E27FC236}">
                 <a16:creationId xmlns:a16="http://schemas.microsoft.com/office/drawing/2014/main" id="{5DBCE864-823D-4A13-9607-5DA1F0ED5FB8}"/>
               </a:ext>
               <a:ext uri="{C183D7F6-B498-43B3-948B-1728B52AA6E4}">
-                <adec:decorative xmlns:adec="http://schemas.microsoft.com/office/drawing/2017/decorative" xmlns="" val="0"/>
+                <adec:decorative xmlns:adec="http://schemas.microsoft.com/office/drawing/2017/decorative" val="0"/>
               </a:ext>
             </a:extLst>
           </p:cNvPr>
@@ -6648,10 +7003,10 @@
           <a:p>
             <a:pPr algn="ctr"/>
             <a:r>
-              <a:rPr lang="en-US" dirty="0"/>
-              <a:t>Your Team Name</a:t>
-            </a:r>
-            <a:endParaRPr lang="en-IN" dirty="0"/>
+              <a:rPr lang="en-US" sz="1600" dirty="0"/>
+              <a:t>Jura Tempest</a:t>
+            </a:r>
+            <a:endParaRPr lang="en-IN" sz="1600" dirty="0"/>
           </a:p>
         </p:txBody>
       </p:sp>
@@ -6679,6 +7034,36 @@
           <a:xfrm>
             <a:off x="9780086" y="1500"/>
             <a:ext cx="2249850" cy="1062337"/>
+          </a:xfrm>
+          <a:prstGeom prst="rect">
+            <a:avLst/>
+          </a:prstGeom>
+        </p:spPr>
+      </p:pic>
+      <p:pic>
+        <p:nvPicPr>
+          <p:cNvPr id="4" name="Picture 3">
+            <a:extLst>
+              <a:ext uri="{FF2B5EF4-FFF2-40B4-BE49-F238E27FC236}">
+                <a16:creationId xmlns:a16="http://schemas.microsoft.com/office/drawing/2014/main" id="{2C557FCE-E3A4-9829-A63C-7170FDDFF7C6}"/>
+              </a:ext>
+            </a:extLst>
+          </p:cNvPr>
+          <p:cNvPicPr>
+            <a:picLocks noChangeAspect="1"/>
+          </p:cNvPicPr>
+          <p:nvPr/>
+        </p:nvPicPr>
+        <p:blipFill>
+          <a:blip r:embed="rId4"/>
+          <a:stretch>
+            <a:fillRect/>
+          </a:stretch>
+        </p:blipFill>
+        <p:spPr>
+          <a:xfrm>
+            <a:off x="6562725" y="1231754"/>
+            <a:ext cx="5629273" cy="5091470"/>
           </a:xfrm>
           <a:prstGeom prst="rect">
             <a:avLst/>
@@ -6813,176 +7198,6 @@
               </a:rPr>
               <a:t>FEASIBILITY AND VIABILITY</a:t>
             </a:r>
-          </a:p>
-        </p:txBody>
-      </p:sp>
-      <p:sp>
-        <p:nvSpPr>
-          <p:cNvPr id="17410" name="TextBox 8"/>
-          <p:cNvSpPr txBox="1">
-            <a:spLocks noChangeArrowheads="1"/>
-          </p:cNvSpPr>
-          <p:nvPr/>
-        </p:nvSpPr>
-        <p:spPr bwMode="auto">
-          <a:xfrm>
-            <a:off x="609600" y="2533653"/>
-            <a:ext cx="9385300" cy="1384995"/>
-          </a:xfrm>
-          <a:prstGeom prst="rect">
-            <a:avLst/>
-          </a:prstGeom>
-          <a:noFill/>
-          <a:ln w="9525">
-            <a:noFill/>
-            <a:miter lim="800000"/>
-            <a:headEnd/>
-            <a:tailEnd/>
-          </a:ln>
-        </p:spPr>
-        <p:txBody>
-          <a:bodyPr wrap="square">
-            <a:spAutoFit/>
-          </a:bodyPr>
-          <a:lstStyle/>
-          <a:p>
-            <a:pPr marL="342900" marR="0" lvl="0" indent="-342900" algn="just" defTabSz="457200" rtl="0" eaLnBrk="1" fontAlgn="base" latinLnBrk="0" hangingPunct="1">
-              <a:lnSpc>
-                <a:spcPct val="100000"/>
-              </a:lnSpc>
-              <a:spcBef>
-                <a:spcPct val="0"/>
-              </a:spcBef>
-              <a:spcAft>
-                <a:spcPct val="0"/>
-              </a:spcAft>
-              <a:buClrTx/>
-              <a:buSzTx/>
-              <a:buFont typeface="Arial" panose="020B0604020202020204" pitchFamily="34" charset="0"/>
-              <a:buChar char="•"/>
-              <a:tabLst/>
-              <a:defRPr/>
-            </a:pPr>
-            <a:r>
-              <a:rPr lang="en-US" sz="2800" dirty="0">
-                <a:solidFill>
-                  <a:prstClr val="black"/>
-                </a:solidFill>
-                <a:latin typeface="Arial" pitchFamily="34" charset="0"/>
-                <a:cs typeface="Arial" pitchFamily="34" charset="0"/>
-              </a:rPr>
-              <a:t>Analysis of the feasibility of the idea</a:t>
-            </a:r>
-            <a:endParaRPr kumimoji="0" lang="en-US" sz="2800" b="0" i="0" u="none" strike="noStrike" kern="1200" cap="none" spc="0" normalizeH="0" baseline="0" noProof="0" dirty="0">
-              <a:ln>
-                <a:noFill/>
-              </a:ln>
-              <a:solidFill>
-                <a:prstClr val="black"/>
-              </a:solidFill>
-              <a:effectLst/>
-              <a:uLnTx/>
-              <a:uFillTx/>
-              <a:latin typeface="Arial" pitchFamily="34" charset="0"/>
-              <a:ea typeface="ＭＳ Ｐゴシック" pitchFamily="1" charset="-128"/>
-              <a:cs typeface="Arial" pitchFamily="34" charset="0"/>
-            </a:endParaRPr>
-          </a:p>
-          <a:p>
-            <a:pPr marL="342900" marR="0" lvl="0" indent="-342900" algn="just" defTabSz="457200" rtl="0" eaLnBrk="1" fontAlgn="base" latinLnBrk="0" hangingPunct="1">
-              <a:lnSpc>
-                <a:spcPct val="100000"/>
-              </a:lnSpc>
-              <a:spcBef>
-                <a:spcPct val="0"/>
-              </a:spcBef>
-              <a:spcAft>
-                <a:spcPct val="0"/>
-              </a:spcAft>
-              <a:buClrTx/>
-              <a:buSzTx/>
-              <a:buFont typeface="Arial" panose="020B0604020202020204" pitchFamily="34" charset="0"/>
-              <a:buChar char="•"/>
-              <a:tabLst/>
-              <a:defRPr/>
-            </a:pPr>
-            <a:r>
-              <a:rPr lang="en-US" sz="2800" dirty="0">
-                <a:solidFill>
-                  <a:prstClr val="black"/>
-                </a:solidFill>
-                <a:latin typeface="Arial" pitchFamily="34" charset="0"/>
-                <a:cs typeface="Arial" pitchFamily="34" charset="0"/>
-              </a:rPr>
-              <a:t>Potential challenges and risks</a:t>
-            </a:r>
-          </a:p>
-          <a:p>
-            <a:pPr marL="342900" marR="0" lvl="0" indent="-342900" algn="just" defTabSz="457200" rtl="0" eaLnBrk="1" fontAlgn="base" latinLnBrk="0" hangingPunct="1">
-              <a:lnSpc>
-                <a:spcPct val="100000"/>
-              </a:lnSpc>
-              <a:spcBef>
-                <a:spcPct val="0"/>
-              </a:spcBef>
-              <a:spcAft>
-                <a:spcPct val="0"/>
-              </a:spcAft>
-              <a:buClrTx/>
-              <a:buSzTx/>
-              <a:buFont typeface="Arial" panose="020B0604020202020204" pitchFamily="34" charset="0"/>
-              <a:buChar char="•"/>
-              <a:tabLst/>
-              <a:defRPr/>
-            </a:pPr>
-            <a:r>
-              <a:rPr kumimoji="0" lang="en-US" sz="2800" b="0" i="0" u="none" strike="noStrike" kern="1200" cap="none" spc="0" normalizeH="0" baseline="0" noProof="0" dirty="0">
-                <a:ln>
-                  <a:noFill/>
-                </a:ln>
-                <a:solidFill>
-                  <a:prstClr val="black"/>
-                </a:solidFill>
-                <a:effectLst/>
-                <a:uLnTx/>
-                <a:uFillTx/>
-                <a:latin typeface="Arial" pitchFamily="34" charset="0"/>
-                <a:ea typeface="ＭＳ Ｐゴシック" pitchFamily="1" charset="-128"/>
-                <a:cs typeface="Arial" pitchFamily="34" charset="0"/>
-              </a:rPr>
-              <a:t>Strategies</a:t>
-            </a:r>
-            <a:r>
-              <a:rPr kumimoji="0" lang="en-US" sz="2800" b="0" i="0" u="none" strike="noStrike" kern="1200" cap="none" spc="0" normalizeH="0" noProof="0" dirty="0">
-                <a:ln>
-                  <a:noFill/>
-                </a:ln>
-                <a:solidFill>
-                  <a:prstClr val="black"/>
-                </a:solidFill>
-                <a:effectLst/>
-                <a:uLnTx/>
-                <a:uFillTx/>
-                <a:latin typeface="Arial" pitchFamily="34" charset="0"/>
-                <a:ea typeface="ＭＳ Ｐゴシック" pitchFamily="1" charset="-128"/>
-                <a:cs typeface="Arial" pitchFamily="34" charset="0"/>
-              </a:rPr>
-              <a:t> for overcoming these challenges</a:t>
-            </a:r>
-            <a:endParaRPr kumimoji="0" lang="en-US" sz="2800" b="0" i="0" u="none" strike="noStrike" kern="1200" cap="none" spc="0" normalizeH="0" baseline="0" noProof="0" dirty="0">
-              <a:ln>
-                <a:noFill/>
-              </a:ln>
-              <a:solidFill>
-                <a:prstClr val="black"/>
-              </a:solidFill>
-              <a:effectLst/>
-              <a:uLnTx/>
-              <a:uFillTx/>
-              <a:latin typeface="Arial" pitchFamily="34" charset="0"/>
-              <a:ea typeface="ＭＳ Ｐゴシック" pitchFamily="1" charset="-128"/>
-              <a:cs typeface="Arial" pitchFamily="34" charset="0"/>
-            </a:endParaRPr>
           </a:p>
         </p:txBody>
       </p:sp>
@@ -7106,23 +7321,6 @@
               <a:tabLst/>
               <a:defRPr/>
             </a:pPr>
-            <a:r>
-              <a:rPr kumimoji="0" lang="en-US" sz="1200" b="0" i="0" u="none" strike="noStrike" kern="1200" cap="none" spc="0" normalizeH="0" baseline="0" noProof="0">
-                <a:ln>
-                  <a:noFill/>
-                </a:ln>
-                <a:solidFill>
-                  <a:prstClr val="white"/>
-                </a:solidFill>
-                <a:effectLst/>
-                <a:uLnTx/>
-                <a:uFillTx/>
-                <a:latin typeface="TradeGothic"/>
-                <a:ea typeface="+mn-ea"/>
-                <a:cs typeface="+mn-cs"/>
-              </a:rPr>
-              <a:t>@SIH Idea submission- Template</a:t>
-            </a:r>
             <a:endParaRPr kumimoji="0" lang="en-US" sz="1200" b="0" i="0" u="none" strike="noStrike" kern="1200" cap="none" spc="0" normalizeH="0" baseline="0" noProof="0" dirty="0">
               <a:ln>
                 <a:noFill/>
@@ -7148,7 +7346,7 @@
                 <a16:creationId xmlns:a16="http://schemas.microsoft.com/office/drawing/2014/main" id="{5DBCE864-823D-4A13-9607-5DA1F0ED5FB8}"/>
               </a:ext>
               <a:ext uri="{C183D7F6-B498-43B3-948B-1728B52AA6E4}">
-                <adec:decorative xmlns:adec="http://schemas.microsoft.com/office/drawing/2017/decorative" xmlns="" val="0"/>
+                <adec:decorative xmlns:adec="http://schemas.microsoft.com/office/drawing/2017/decorative" val="0"/>
               </a:ext>
             </a:extLst>
           </p:cNvPr>
@@ -7184,10 +7382,9 @@
           <a:p>
             <a:pPr algn="ctr"/>
             <a:r>
-              <a:rPr lang="en-US" dirty="0"/>
-              <a:t>Your Team Name</a:t>
-            </a:r>
-            <a:endParaRPr lang="en-IN" dirty="0"/>
+              <a:rPr lang="en-IN" sz="1600" dirty="0"/>
+              <a:t>Jura Tempest</a:t>
+            </a:r>
           </a:p>
         </p:txBody>
       </p:sp>
@@ -7221,6 +7418,413 @@
           </a:prstGeom>
         </p:spPr>
       </p:pic>
+      <p:graphicFrame>
+        <p:nvGraphicFramePr>
+          <p:cNvPr id="8" name="Table 7">
+            <a:extLst>
+              <a:ext uri="{FF2B5EF4-FFF2-40B4-BE49-F238E27FC236}">
+                <a16:creationId xmlns:a16="http://schemas.microsoft.com/office/drawing/2014/main" id="{7C182EAA-DB1C-99E2-ED16-2EA50B4F4D9A}"/>
+              </a:ext>
+            </a:extLst>
+          </p:cNvPr>
+          <p:cNvGraphicFramePr>
+            <a:graphicFrameLocks noGrp="1"/>
+          </p:cNvGraphicFramePr>
+          <p:nvPr>
+            <p:extLst>
+              <p:ext uri="{D42A27DB-BD31-4B8C-83A1-F6EECF244321}">
+                <p14:modId xmlns:p14="http://schemas.microsoft.com/office/powerpoint/2010/main" val="1994210490"/>
+              </p:ext>
+            </p:extLst>
+          </p:nvPr>
+        </p:nvGraphicFramePr>
+        <p:xfrm>
+          <a:off x="329773" y="1588238"/>
+          <a:ext cx="3788664" cy="3538162"/>
+        </p:xfrm>
+        <a:graphic>
+          <a:graphicData uri="http://schemas.openxmlformats.org/drawingml/2006/table">
+            <a:tbl>
+              <a:tblPr firstRow="1" bandRow="1">
+                <a:tableStyleId>{5A111915-BE36-4E01-A7E5-04B1672EAD32}</a:tableStyleId>
+              </a:tblPr>
+              <a:tblGrid>
+                <a:gridCol w="3788664">
+                  <a:extLst>
+                    <a:ext uri="{9D8B030D-6E8A-4147-A177-3AD203B41FA5}">
+                      <a16:colId xmlns:a16="http://schemas.microsoft.com/office/drawing/2014/main" val="2444065359"/>
+                    </a:ext>
+                  </a:extLst>
+                </a:gridCol>
+              </a:tblGrid>
+              <a:tr h="579668">
+                <a:tc>
+                  <a:txBody>
+                    <a:bodyPr/>
+                    <a:lstStyle/>
+                    <a:p>
+                      <a:pPr algn="ctr"/>
+                      <a:r>
+                        <a:rPr lang="en-US" dirty="0"/>
+                        <a:t>IT ALREADY WORKS</a:t>
+                      </a:r>
+                      <a:endParaRPr lang="en-AE" dirty="0"/>
+                    </a:p>
+                  </a:txBody>
+                  <a:tcPr anchor="ctr"/>
+                </a:tc>
+                <a:extLst>
+                  <a:ext uri="{0D108BD9-81ED-4DB2-BD59-A6C34878D82A}">
+                    <a16:rowId xmlns:a16="http://schemas.microsoft.com/office/drawing/2014/main" val="3439454203"/>
+                  </a:ext>
+                </a:extLst>
+              </a:tr>
+              <a:tr h="2958494">
+                <a:tc>
+                  <a:txBody>
+                    <a:bodyPr/>
+                    <a:lstStyle/>
+                    <a:p>
+                      <a:pPr marL="285750" indent="-285750">
+                        <a:buClr>
+                          <a:srgbClr val="4A9ED2"/>
+                        </a:buClr>
+                        <a:buFont typeface="Arial" panose="020B0604020202020204" pitchFamily="34" charset="0"/>
+                        <a:buChar char="•"/>
+                      </a:pPr>
+                      <a:r>
+                        <a:rPr lang="en-US" sz="1400" dirty="0"/>
+                        <a:t>The full pipeline runs end to end today - ingest, retrieve, gate, tutor, dashboard. Every part is free and open: Python, Neo4j Community, open-weight models.</a:t>
+                      </a:r>
+                    </a:p>
+                    <a:p>
+                      <a:pPr marL="285750" indent="-285750">
+                        <a:buClr>
+                          <a:srgbClr val="4A9ED2"/>
+                        </a:buClr>
+                        <a:buFont typeface="Arial" panose="020B0604020202020204" pitchFamily="34" charset="0"/>
+                        <a:buChar char="•"/>
+                      </a:pPr>
+                      <a:r>
+                        <a:rPr lang="en-US" sz="1400" dirty="0"/>
+                        <a:t>The data is free and official - complete-book zips from ncert.nic.in, with SHA-256 recorded.</a:t>
+                      </a:r>
+                    </a:p>
+                    <a:p>
+                      <a:pPr marL="285750" indent="-285750">
+                        <a:buClr>
+                          <a:srgbClr val="4A9ED2"/>
+                        </a:buClr>
+                        <a:buFont typeface="Arial" panose="020B0604020202020204" pitchFamily="34" charset="0"/>
+                        <a:buChar char="•"/>
+                      </a:pPr>
+                      <a:r>
+                        <a:rPr lang="en-US" sz="1400" dirty="0"/>
+                        <a:t>Models are loaded, used, then released, so a modest GPU is enough.</a:t>
+                      </a:r>
+                    </a:p>
+                    <a:p>
+                      <a:pPr marL="285750" indent="-285750">
+                        <a:buClr>
+                          <a:srgbClr val="4A9ED2"/>
+                        </a:buClr>
+                        <a:buFont typeface="Arial" panose="020B0604020202020204" pitchFamily="34" charset="0"/>
+                        <a:buChar char="•"/>
+                      </a:pPr>
+                      <a:r>
+                        <a:rPr lang="en-US" sz="1400" dirty="0"/>
+                        <a:t>Nothing needs a network, so a school lab PC is enough.</a:t>
+                      </a:r>
+                      <a:endParaRPr lang="en-AE" sz="1400" dirty="0"/>
+                    </a:p>
+                  </a:txBody>
+                  <a:tcPr/>
+                </a:tc>
+                <a:extLst>
+                  <a:ext uri="{0D108BD9-81ED-4DB2-BD59-A6C34878D82A}">
+                    <a16:rowId xmlns:a16="http://schemas.microsoft.com/office/drawing/2014/main" val="875523031"/>
+                  </a:ext>
+                </a:extLst>
+              </a:tr>
+            </a:tbl>
+          </a:graphicData>
+        </a:graphic>
+      </p:graphicFrame>
+      <p:graphicFrame>
+        <p:nvGraphicFramePr>
+          <p:cNvPr id="17" name="Table 16">
+            <a:extLst>
+              <a:ext uri="{FF2B5EF4-FFF2-40B4-BE49-F238E27FC236}">
+                <a16:creationId xmlns:a16="http://schemas.microsoft.com/office/drawing/2014/main" id="{70D29B1A-AD08-EEEF-CCC4-0776E539FD2D}"/>
+              </a:ext>
+            </a:extLst>
+          </p:cNvPr>
+          <p:cNvGraphicFramePr>
+            <a:graphicFrameLocks noGrp="1"/>
+          </p:cNvGraphicFramePr>
+          <p:nvPr>
+            <p:extLst>
+              <p:ext uri="{D42A27DB-BD31-4B8C-83A1-F6EECF244321}">
+                <p14:modId xmlns:p14="http://schemas.microsoft.com/office/powerpoint/2010/main" val="1920213653"/>
+              </p:ext>
+            </p:extLst>
+          </p:nvPr>
+        </p:nvGraphicFramePr>
+        <p:xfrm>
+          <a:off x="4284901" y="1588238"/>
+          <a:ext cx="3788664" cy="3538162"/>
+        </p:xfrm>
+        <a:graphic>
+          <a:graphicData uri="http://schemas.openxmlformats.org/drawingml/2006/table">
+            <a:tbl>
+              <a:tblPr firstRow="1" bandRow="1">
+                <a:tableStyleId>{912C8C85-51F0-491E-9774-3900AFEF0FD7}</a:tableStyleId>
+              </a:tblPr>
+              <a:tblGrid>
+                <a:gridCol w="3788664">
+                  <a:extLst>
+                    <a:ext uri="{9D8B030D-6E8A-4147-A177-3AD203B41FA5}">
+                      <a16:colId xmlns:a16="http://schemas.microsoft.com/office/drawing/2014/main" val="2444065359"/>
+                    </a:ext>
+                  </a:extLst>
+                </a:gridCol>
+              </a:tblGrid>
+              <a:tr h="579668">
+                <a:tc>
+                  <a:txBody>
+                    <a:bodyPr/>
+                    <a:lstStyle/>
+                    <a:p>
+                      <a:pPr algn="ctr"/>
+                      <a:r>
+                        <a:rPr lang="en-US" dirty="0"/>
+                        <a:t>WHAT COULD GO WRONG</a:t>
+                      </a:r>
+                      <a:endParaRPr lang="en-AE" dirty="0"/>
+                    </a:p>
+                  </a:txBody>
+                  <a:tcPr anchor="ctr"/>
+                </a:tc>
+                <a:extLst>
+                  <a:ext uri="{0D108BD9-81ED-4DB2-BD59-A6C34878D82A}">
+                    <a16:rowId xmlns:a16="http://schemas.microsoft.com/office/drawing/2014/main" val="3439454203"/>
+                  </a:ext>
+                </a:extLst>
+              </a:tr>
+              <a:tr h="2958494">
+                <a:tc>
+                  <a:txBody>
+                    <a:bodyPr/>
+                    <a:lstStyle/>
+                    <a:p>
+                      <a:pPr marL="285750" indent="-285750">
+                        <a:buClr>
+                          <a:schemeClr val="accent6"/>
+                        </a:buClr>
+                        <a:buFont typeface="Arial" panose="020B0604020202020204" pitchFamily="34" charset="0"/>
+                        <a:buChar char="•"/>
+                      </a:pPr>
+                      <a:r>
+                        <a:rPr lang="en-US" sz="1400" dirty="0"/>
+                        <a:t>On a small GPU some layers sit in RAM, so a reply can take a while.</a:t>
+                      </a:r>
+                    </a:p>
+                    <a:p>
+                      <a:pPr marL="285750" indent="-285750">
+                        <a:buClr>
+                          <a:schemeClr val="accent6"/>
+                        </a:buClr>
+                        <a:buFont typeface="Arial" panose="020B0604020202020204" pitchFamily="34" charset="0"/>
+                        <a:buChar char="•"/>
+                      </a:pPr>
+                      <a:r>
+                        <a:rPr lang="en-US" sz="1400" dirty="0"/>
+                        <a:t>The evidence-gate thresholds are heuristics - they are not validated yet.</a:t>
+                      </a:r>
+                    </a:p>
+                    <a:p>
+                      <a:pPr marL="285750" indent="-285750">
+                        <a:buClr>
+                          <a:schemeClr val="accent6"/>
+                        </a:buClr>
+                        <a:buFont typeface="Arial" panose="020B0604020202020204" pitchFamily="34" charset="0"/>
+                        <a:buChar char="•"/>
+                      </a:pPr>
+                      <a:r>
+                        <a:rPr lang="en-US" sz="1400" dirty="0"/>
+                        <a:t>We have no retrieval accuracy numbers, because no labelled question set exists.</a:t>
+                      </a:r>
+                    </a:p>
+                    <a:p>
+                      <a:pPr marL="285750" indent="-285750">
+                        <a:buClr>
+                          <a:schemeClr val="accent6"/>
+                        </a:buClr>
+                        <a:buFont typeface="Arial" panose="020B0604020202020204" pitchFamily="34" charset="0"/>
+                        <a:buChar char="•"/>
+                      </a:pPr>
+                      <a:r>
+                        <a:rPr lang="en-US" sz="1400" dirty="0"/>
+                        <a:t>Section titles are noisy - page furniture is sometimes read as </a:t>
+                      </a:r>
+                      <a:r>
+                        <a:rPr lang="en-US" sz="1400" dirty="0" err="1"/>
+                        <a:t>aheading</a:t>
+                      </a:r>
+                      <a:r>
+                        <a:rPr lang="en-US" sz="1400" dirty="0"/>
+                        <a:t>.</a:t>
+                      </a:r>
+                      <a:endParaRPr lang="en-AE" sz="1400" dirty="0"/>
+                    </a:p>
+                  </a:txBody>
+                  <a:tcPr/>
+                </a:tc>
+                <a:extLst>
+                  <a:ext uri="{0D108BD9-81ED-4DB2-BD59-A6C34878D82A}">
+                    <a16:rowId xmlns:a16="http://schemas.microsoft.com/office/drawing/2014/main" val="875523031"/>
+                  </a:ext>
+                </a:extLst>
+              </a:tr>
+            </a:tbl>
+          </a:graphicData>
+        </a:graphic>
+      </p:graphicFrame>
+      <p:graphicFrame>
+        <p:nvGraphicFramePr>
+          <p:cNvPr id="19" name="Table 18">
+            <a:extLst>
+              <a:ext uri="{FF2B5EF4-FFF2-40B4-BE49-F238E27FC236}">
+                <a16:creationId xmlns:a16="http://schemas.microsoft.com/office/drawing/2014/main" id="{A5BD2385-8A30-4CD2-6417-4F455965014F}"/>
+              </a:ext>
+            </a:extLst>
+          </p:cNvPr>
+          <p:cNvGraphicFramePr>
+            <a:graphicFrameLocks noGrp="1"/>
+          </p:cNvGraphicFramePr>
+          <p:nvPr>
+            <p:extLst>
+              <p:ext uri="{D42A27DB-BD31-4B8C-83A1-F6EECF244321}">
+                <p14:modId xmlns:p14="http://schemas.microsoft.com/office/powerpoint/2010/main" val="1995456896"/>
+              </p:ext>
+            </p:extLst>
+          </p:nvPr>
+        </p:nvGraphicFramePr>
+        <p:xfrm>
+          <a:off x="8240029" y="1588238"/>
+          <a:ext cx="3788664" cy="3538162"/>
+        </p:xfrm>
+        <a:graphic>
+          <a:graphicData uri="http://schemas.openxmlformats.org/drawingml/2006/table">
+            <a:tbl>
+              <a:tblPr firstRow="1" bandRow="1">
+                <a:tableStyleId>{F2DE63D5-997A-4646-A377-4702673A728D}</a:tableStyleId>
+              </a:tblPr>
+              <a:tblGrid>
+                <a:gridCol w="3788664">
+                  <a:extLst>
+                    <a:ext uri="{9D8B030D-6E8A-4147-A177-3AD203B41FA5}">
+                      <a16:colId xmlns:a16="http://schemas.microsoft.com/office/drawing/2014/main" val="2444065359"/>
+                    </a:ext>
+                  </a:extLst>
+                </a:gridCol>
+              </a:tblGrid>
+              <a:tr h="579668">
+                <a:tc>
+                  <a:txBody>
+                    <a:bodyPr/>
+                    <a:lstStyle/>
+                    <a:p>
+                      <a:pPr algn="ctr"/>
+                      <a:r>
+                        <a:rPr lang="en-US" dirty="0"/>
+                        <a:t>HOW WE HANDLE IT</a:t>
+                      </a:r>
+                      <a:endParaRPr lang="en-AE" dirty="0"/>
+                    </a:p>
+                  </a:txBody>
+                  <a:tcPr anchor="ctr"/>
+                </a:tc>
+                <a:extLst>
+                  <a:ext uri="{0D108BD9-81ED-4DB2-BD59-A6C34878D82A}">
+                    <a16:rowId xmlns:a16="http://schemas.microsoft.com/office/drawing/2014/main" val="3439454203"/>
+                  </a:ext>
+                </a:extLst>
+              </a:tr>
+              <a:tr h="2958494">
+                <a:tc>
+                  <a:txBody>
+                    <a:bodyPr/>
+                    <a:lstStyle/>
+                    <a:p>
+                      <a:pPr marL="285750" indent="-285750">
+                        <a:buClr>
+                          <a:schemeClr val="accent3"/>
+                        </a:buClr>
+                        <a:buFont typeface="Arial" panose="020B0604020202020204" pitchFamily="34" charset="0"/>
+                        <a:buChar char="•"/>
+                      </a:pPr>
+                      <a:r>
+                        <a:rPr lang="en-US" sz="1400" dirty="0"/>
+                        <a:t>A hardware-aware loader splits weights between GPU and RAM and frees each model after use.</a:t>
+                      </a:r>
+                    </a:p>
+                    <a:p>
+                      <a:pPr marL="285750" indent="-285750">
+                        <a:buClr>
+                          <a:schemeClr val="accent3"/>
+                        </a:buClr>
+                        <a:buFont typeface="Arial" panose="020B0604020202020204" pitchFamily="34" charset="0"/>
+                        <a:buChar char="•"/>
+                      </a:pPr>
+                      <a:r>
+                        <a:rPr lang="en-US" sz="1400" dirty="0"/>
+                        <a:t>Build a labelled question set, then tune the gate against </a:t>
+                      </a:r>
+                      <a:r>
+                        <a:rPr lang="en-US" sz="1400" dirty="0" err="1"/>
+                        <a:t>Recall@K</a:t>
+                      </a:r>
+                      <a:r>
+                        <a:rPr lang="en-US" sz="1400" dirty="0"/>
+                        <a:t>, MRR and </a:t>
+                      </a:r>
+                      <a:r>
+                        <a:rPr lang="en-US" sz="1400" dirty="0" err="1"/>
+                        <a:t>nDCG</a:t>
+                      </a:r>
+                      <a:r>
+                        <a:rPr lang="en-US" sz="1400" dirty="0"/>
+                        <a:t>.</a:t>
+                      </a:r>
+                    </a:p>
+                    <a:p>
+                      <a:pPr marL="285750" indent="-285750">
+                        <a:buClr>
+                          <a:schemeClr val="accent3"/>
+                        </a:buClr>
+                        <a:buFont typeface="Arial" panose="020B0604020202020204" pitchFamily="34" charset="0"/>
+                        <a:buChar char="•"/>
+                      </a:pPr>
+                      <a:r>
+                        <a:rPr lang="en-US" sz="1400" dirty="0"/>
+                        <a:t>Fall back to page and chapter lineage instead of trusting section titles.</a:t>
+                      </a:r>
+                      <a:endParaRPr lang="en-AE" sz="1400" dirty="0"/>
+                    </a:p>
+                  </a:txBody>
+                  <a:tcPr/>
+                </a:tc>
+                <a:extLst>
+                  <a:ext uri="{0D108BD9-81ED-4DB2-BD59-A6C34878D82A}">
+                    <a16:rowId xmlns:a16="http://schemas.microsoft.com/office/drawing/2014/main" val="875523031"/>
+                  </a:ext>
+                </a:extLst>
+              </a:tr>
+            </a:tbl>
+          </a:graphicData>
+        </a:graphic>
+      </p:graphicFrame>
     </p:spTree>
     <p:extLst>
       <p:ext uri="{BB962C8B-B14F-4D97-AF65-F5344CB8AC3E}">
@@ -7353,102 +7957,6 @@
                 <a:cs typeface="Times New Roman" panose="02020603050405020304" pitchFamily="18" charset="0"/>
               </a:rPr>
               <a:t>IMPACT AND BENEFITS</a:t>
-            </a:r>
-          </a:p>
-        </p:txBody>
-      </p:sp>
-      <p:sp>
-        <p:nvSpPr>
-          <p:cNvPr id="17410" name="TextBox 8"/>
-          <p:cNvSpPr txBox="1">
-            <a:spLocks noChangeArrowheads="1"/>
-          </p:cNvSpPr>
-          <p:nvPr/>
-        </p:nvSpPr>
-        <p:spPr bwMode="auto">
-          <a:xfrm>
-            <a:off x="609600" y="2533653"/>
-            <a:ext cx="9385300" cy="1384995"/>
-          </a:xfrm>
-          <a:prstGeom prst="rect">
-            <a:avLst/>
-          </a:prstGeom>
-          <a:noFill/>
-          <a:ln w="9525">
-            <a:noFill/>
-            <a:miter lim="800000"/>
-            <a:headEnd/>
-            <a:tailEnd/>
-          </a:ln>
-        </p:spPr>
-        <p:txBody>
-          <a:bodyPr wrap="square">
-            <a:spAutoFit/>
-          </a:bodyPr>
-          <a:lstStyle/>
-          <a:p>
-            <a:pPr marL="342900" marR="0" lvl="0" indent="-342900" algn="just" defTabSz="457200" rtl="0" eaLnBrk="1" fontAlgn="base" latinLnBrk="0" hangingPunct="1">
-              <a:lnSpc>
-                <a:spcPct val="100000"/>
-              </a:lnSpc>
-              <a:spcBef>
-                <a:spcPct val="0"/>
-              </a:spcBef>
-              <a:spcAft>
-                <a:spcPct val="0"/>
-              </a:spcAft>
-              <a:buClrTx/>
-              <a:buSzTx/>
-              <a:buFont typeface="Arial" panose="020B0604020202020204" pitchFamily="34" charset="0"/>
-              <a:buChar char="•"/>
-              <a:tabLst/>
-              <a:defRPr/>
-            </a:pPr>
-            <a:r>
-              <a:rPr kumimoji="0" lang="en-US" sz="2800" b="0" i="0" u="none" strike="noStrike" kern="1200" cap="none" spc="0" normalizeH="0" baseline="0" noProof="0" dirty="0">
-                <a:ln>
-                  <a:noFill/>
-                </a:ln>
-                <a:solidFill>
-                  <a:prstClr val="black"/>
-                </a:solidFill>
-                <a:effectLst/>
-                <a:uLnTx/>
-                <a:uFillTx/>
-                <a:latin typeface="Arial" pitchFamily="34" charset="0"/>
-                <a:ea typeface="ＭＳ Ｐゴシック" pitchFamily="1" charset="-128"/>
-                <a:cs typeface="Arial" pitchFamily="34" charset="0"/>
-              </a:rPr>
-              <a:t>Potential impact on the target audience</a:t>
-            </a:r>
-          </a:p>
-          <a:p>
-            <a:pPr marL="342900" marR="0" lvl="0" indent="-342900" algn="just" defTabSz="457200" rtl="0" eaLnBrk="1" fontAlgn="base" latinLnBrk="0" hangingPunct="1">
-              <a:lnSpc>
-                <a:spcPct val="100000"/>
-              </a:lnSpc>
-              <a:spcBef>
-                <a:spcPct val="0"/>
-              </a:spcBef>
-              <a:spcAft>
-                <a:spcPct val="0"/>
-              </a:spcAft>
-              <a:buClrTx/>
-              <a:buSzTx/>
-              <a:buFont typeface="Arial" panose="020B0604020202020204" pitchFamily="34" charset="0"/>
-              <a:buChar char="•"/>
-              <a:tabLst/>
-              <a:defRPr/>
-            </a:pPr>
-            <a:r>
-              <a:rPr lang="en-US" sz="2800" dirty="0">
-                <a:solidFill>
-                  <a:prstClr val="black"/>
-                </a:solidFill>
-                <a:latin typeface="Arial" pitchFamily="34" charset="0"/>
-                <a:cs typeface="Arial" pitchFamily="34" charset="0"/>
-              </a:rPr>
-              <a:t>Benefits of the solution (social, economic, environmental, etc.)</a:t>
             </a:r>
           </a:p>
         </p:txBody>
@@ -7573,23 +8081,6 @@
               <a:tabLst/>
               <a:defRPr/>
             </a:pPr>
-            <a:r>
-              <a:rPr kumimoji="0" lang="en-US" sz="1200" b="0" i="0" u="none" strike="noStrike" kern="1200" cap="none" spc="0" normalizeH="0" baseline="0" noProof="0">
-                <a:ln>
-                  <a:noFill/>
-                </a:ln>
-                <a:solidFill>
-                  <a:prstClr val="white"/>
-                </a:solidFill>
-                <a:effectLst/>
-                <a:uLnTx/>
-                <a:uFillTx/>
-                <a:latin typeface="TradeGothic"/>
-                <a:ea typeface="+mn-ea"/>
-                <a:cs typeface="+mn-cs"/>
-              </a:rPr>
-              <a:t>@SIH Idea submission- Template</a:t>
-            </a:r>
             <a:endParaRPr kumimoji="0" lang="en-US" sz="1200" b="0" i="0" u="none" strike="noStrike" kern="1200" cap="none" spc="0" normalizeH="0" baseline="0" noProof="0" dirty="0">
               <a:ln>
                 <a:noFill/>
@@ -7615,7 +8106,7 @@
                 <a16:creationId xmlns:a16="http://schemas.microsoft.com/office/drawing/2014/main" id="{5DBCE864-823D-4A13-9607-5DA1F0ED5FB8}"/>
               </a:ext>
               <a:ext uri="{C183D7F6-B498-43B3-948B-1728B52AA6E4}">
-                <adec:decorative xmlns:adec="http://schemas.microsoft.com/office/drawing/2017/decorative" xmlns="" val="0"/>
+                <adec:decorative xmlns:adec="http://schemas.microsoft.com/office/drawing/2017/decorative" val="0"/>
               </a:ext>
             </a:extLst>
           </p:cNvPr>
@@ -7651,10 +8142,10 @@
           <a:p>
             <a:pPr algn="ctr"/>
             <a:r>
-              <a:rPr lang="en-US" dirty="0"/>
-              <a:t>Your Team Name</a:t>
-            </a:r>
-            <a:endParaRPr lang="en-IN" dirty="0"/>
+              <a:rPr lang="en-US" sz="1600" dirty="0"/>
+              <a:t>Jura Tempest</a:t>
+            </a:r>
+            <a:endParaRPr lang="en-IN" sz="1600" dirty="0"/>
           </a:p>
         </p:txBody>
       </p:sp>
@@ -7682,6 +8173,36 @@
           <a:xfrm>
             <a:off x="9780086" y="1500"/>
             <a:ext cx="2249850" cy="1062337"/>
+          </a:xfrm>
+          <a:prstGeom prst="rect">
+            <a:avLst/>
+          </a:prstGeom>
+        </p:spPr>
+      </p:pic>
+      <p:pic>
+        <p:nvPicPr>
+          <p:cNvPr id="3" name="Picture 2">
+            <a:extLst>
+              <a:ext uri="{FF2B5EF4-FFF2-40B4-BE49-F238E27FC236}">
+                <a16:creationId xmlns:a16="http://schemas.microsoft.com/office/drawing/2014/main" id="{A1C79E8F-FD66-BAE5-DEB2-F7DD24F1E2A0}"/>
+              </a:ext>
+            </a:extLst>
+          </p:cNvPr>
+          <p:cNvPicPr>
+            <a:picLocks noChangeAspect="1"/>
+          </p:cNvPicPr>
+          <p:nvPr/>
+        </p:nvPicPr>
+        <p:blipFill>
+          <a:blip r:embed="rId4"/>
+          <a:stretch>
+            <a:fillRect/>
+          </a:stretch>
+        </p:blipFill>
+        <p:spPr>
+          <a:xfrm>
+            <a:off x="-1" y="1312980"/>
+            <a:ext cx="12192000" cy="5005987"/>
           </a:xfrm>
           <a:prstGeom prst="rect">
             <a:avLst/>
@@ -7834,8 +8355,8 @@
         </p:nvSpPr>
         <p:spPr bwMode="auto">
           <a:xfrm>
-            <a:off x="609600" y="2795263"/>
-            <a:ext cx="9385300" cy="523220"/>
+            <a:off x="365760" y="1115568"/>
+            <a:ext cx="11475720" cy="5138928"/>
           </a:xfrm>
           <a:prstGeom prst="rect">
             <a:avLst/>
@@ -7849,52 +8370,429 @@
           </a:ln>
         </p:spPr>
         <p:txBody>
-          <a:bodyPr wrap="square">
-            <a:spAutoFit/>
+          <a:bodyPr wrap="square" lIns="45720" tIns="45720" rIns="45720" bIns="45720">
+            <a:noAutofit/>
           </a:bodyPr>
           <a:lstStyle/>
           <a:p>
-            <a:pPr marL="342900" marR="0" lvl="0" indent="-342900" algn="just" defTabSz="457200" rtl="0" eaLnBrk="1" fontAlgn="base" latinLnBrk="0" hangingPunct="1">
+            <a:pPr marL="228600" indent="-228600" algn="l">
               <a:lnSpc>
                 <a:spcPct val="100000"/>
               </a:lnSpc>
               <a:spcBef>
-                <a:spcPct val="0"/>
+                <a:spcPts val="0"/>
               </a:spcBef>
               <a:spcAft>
-                <a:spcPct val="0"/>
+                <a:spcPts val="400"/>
               </a:spcAft>
-              <a:buClrTx/>
-              <a:buSzTx/>
-              <a:buFont typeface="Arial" panose="020B0604020202020204" pitchFamily="34" charset="0"/>
-              <a:buChar char="•"/>
-              <a:tabLst/>
-              <a:defRPr/>
+              <a:buFont typeface="Wingdings" panose="05000000000000000000" pitchFamily="2" charset="2"/>
+              <a:buChar char="v"/>
             </a:pPr>
             <a:r>
-              <a:rPr lang="en-US" sz="2800" noProof="0" dirty="0">
+              <a:rPr lang="en-US" sz="1400" b="1" i="0" u="sng" dirty="0">
                 <a:solidFill>
-                  <a:prstClr val="black"/>
+                  <a:srgbClr val="1F3864"/>
                 </a:solidFill>
                 <a:latin typeface="Arial" pitchFamily="34" charset="0"/>
                 <a:cs typeface="Arial" pitchFamily="34" charset="0"/>
               </a:rPr>
               <a:t>Details / Links of the reference and research work</a:t>
             </a:r>
-            <a:endParaRPr kumimoji="0" lang="en-US" sz="2800" b="0" i="0" u="none" strike="noStrike" kern="1200" cap="none" spc="0" normalizeH="0" baseline="0" noProof="0" dirty="0">
-              <a:ln>
-                <a:noFill/>
-              </a:ln>
-              <a:solidFill>
-                <a:prstClr val="black"/>
-              </a:solidFill>
-              <a:effectLst/>
-              <a:uLnTx/>
-              <a:uFillTx/>
-              <a:latin typeface="Arial" pitchFamily="34" charset="0"/>
-              <a:ea typeface="ＭＳ Ｐゴシック" pitchFamily="1" charset="-128"/>
-              <a:cs typeface="Arial" pitchFamily="34" charset="0"/>
-            </a:endParaRPr>
+          </a:p>
+          <a:p>
+            <a:pPr marL="0" indent="0" algn="l">
+              <a:lnSpc>
+                <a:spcPct val="100000"/>
+              </a:lnSpc>
+              <a:spcBef>
+                <a:spcPts val="150"/>
+              </a:spcBef>
+              <a:spcAft>
+                <a:spcPts val="250"/>
+              </a:spcAft>
+              <a:buNone/>
+            </a:pPr>
+            <a:r>
+              <a:rPr lang="en-US" sz="1350" b="1" i="0" dirty="0">
+                <a:solidFill>
+                  <a:srgbClr val="0B6FB4"/>
+                </a:solidFill>
+                <a:latin typeface="Arial" pitchFamily="34" charset="0"/>
+                <a:cs typeface="Arial" pitchFamily="34" charset="0"/>
+              </a:rPr>
+              <a:t>Curriculum source</a:t>
+            </a:r>
+          </a:p>
+          <a:p>
+            <a:pPr marL="205740" indent="-205740" algn="l">
+              <a:lnSpc>
+                <a:spcPct val="100000"/>
+              </a:lnSpc>
+              <a:spcBef>
+                <a:spcPts val="0"/>
+              </a:spcBef>
+              <a:spcAft>
+                <a:spcPts val="200"/>
+              </a:spcAft>
+              <a:buFont typeface="Arial" panose="020B0604020202020204" pitchFamily="34" charset="0"/>
+              <a:buChar char="•"/>
+            </a:pPr>
+            <a:r>
+              <a:rPr lang="en-US" sz="1200" b="0" i="0" dirty="0">
+                <a:solidFill>
+                  <a:srgbClr val="1A2434"/>
+                </a:solidFill>
+                <a:latin typeface="Arial" pitchFamily="34" charset="0"/>
+                <a:cs typeface="Arial" pitchFamily="34" charset="0"/>
+              </a:rPr>
+              <a:t>NCERT textbooks, classes 1–12, official English editions — https://ncert.nic.in/textbook.php  ·  the only corpus we ingest; complete-book zips, with a SHA-256 manifest kept in the repository.</a:t>
+            </a:r>
+          </a:p>
+          <a:p>
+            <a:pPr marL="0" indent="0" algn="l">
+              <a:lnSpc>
+                <a:spcPct val="100000"/>
+              </a:lnSpc>
+              <a:spcBef>
+                <a:spcPts val="400"/>
+              </a:spcBef>
+              <a:spcAft>
+                <a:spcPts val="250"/>
+              </a:spcAft>
+              <a:buNone/>
+            </a:pPr>
+            <a:r>
+              <a:rPr lang="en-US" sz="1350" b="1" i="0" dirty="0">
+                <a:solidFill>
+                  <a:srgbClr val="0B6FB4"/>
+                </a:solidFill>
+                <a:latin typeface="Arial" pitchFamily="34" charset="0"/>
+                <a:cs typeface="Arial" pitchFamily="34" charset="0"/>
+              </a:rPr>
+              <a:t>Why a tutor, and why grounding matters</a:t>
+            </a:r>
+          </a:p>
+          <a:p>
+            <a:pPr marL="205740" indent="-205740" algn="l">
+              <a:lnSpc>
+                <a:spcPct val="100000"/>
+              </a:lnSpc>
+              <a:spcBef>
+                <a:spcPts val="0"/>
+              </a:spcBef>
+              <a:spcAft>
+                <a:spcPts val="200"/>
+              </a:spcAft>
+              <a:buFont typeface="Arial" panose="020B0604020202020204" pitchFamily="34" charset="0"/>
+              <a:buChar char="•"/>
+            </a:pPr>
+            <a:r>
+              <a:rPr lang="en-US" sz="1200" b="0" i="0" dirty="0">
+                <a:solidFill>
+                  <a:srgbClr val="1A2434"/>
+                </a:solidFill>
+                <a:latin typeface="Arial" pitchFamily="34" charset="0"/>
+                <a:cs typeface="Arial" pitchFamily="34" charset="0"/>
+              </a:rPr>
+              <a:t>B. S. Bloom (1984), “The 2 Sigma Problem: The Search for Methods of Group Instruction as Effective as One-to-One Tutoring”, Educational Researcher 13(6), 4–16.</a:t>
+            </a:r>
+          </a:p>
+          <a:p>
+            <a:pPr marL="205740" indent="-205740" algn="l">
+              <a:lnSpc>
+                <a:spcPct val="100000"/>
+              </a:lnSpc>
+              <a:spcBef>
+                <a:spcPts val="0"/>
+              </a:spcBef>
+              <a:spcAft>
+                <a:spcPts val="200"/>
+              </a:spcAft>
+              <a:buFont typeface="Arial" panose="020B0604020202020204" pitchFamily="34" charset="0"/>
+              <a:buChar char="•"/>
+            </a:pPr>
+            <a:r>
+              <a:rPr lang="en-US" sz="1200" b="0" i="0" dirty="0">
+                <a:solidFill>
+                  <a:srgbClr val="1A2434"/>
+                </a:solidFill>
+                <a:latin typeface="Arial" pitchFamily="34" charset="0"/>
+                <a:cs typeface="Arial" pitchFamily="34" charset="0"/>
+              </a:rPr>
+              <a:t>Z. Ji et al. (2023), “Survey of Hallucination in Natural Language Generation”, ACM Computing Surveys 55(12) — arXiv:2202.03629.</a:t>
+            </a:r>
+          </a:p>
+          <a:p>
+            <a:pPr marL="0" indent="0" algn="l">
+              <a:lnSpc>
+                <a:spcPct val="100000"/>
+              </a:lnSpc>
+              <a:spcBef>
+                <a:spcPts val="400"/>
+              </a:spcBef>
+              <a:spcAft>
+                <a:spcPts val="250"/>
+              </a:spcAft>
+              <a:buNone/>
+            </a:pPr>
+            <a:r>
+              <a:rPr lang="en-US" sz="1350" b="1" i="0" dirty="0">
+                <a:solidFill>
+                  <a:srgbClr val="0B6FB4"/>
+                </a:solidFill>
+                <a:latin typeface="Arial" pitchFamily="34" charset="0"/>
+                <a:cs typeface="Arial" pitchFamily="34" charset="0"/>
+              </a:rPr>
+              <a:t>Retrieval and fusion</a:t>
+            </a:r>
+          </a:p>
+          <a:p>
+            <a:pPr marL="205740" indent="-205740" algn="l">
+              <a:lnSpc>
+                <a:spcPct val="100000"/>
+              </a:lnSpc>
+              <a:spcBef>
+                <a:spcPts val="0"/>
+              </a:spcBef>
+              <a:spcAft>
+                <a:spcPts val="200"/>
+              </a:spcAft>
+              <a:buFont typeface="Arial" panose="020B0604020202020204" pitchFamily="34" charset="0"/>
+              <a:buChar char="•"/>
+            </a:pPr>
+            <a:r>
+              <a:rPr lang="en-US" sz="1200" b="0" i="0" dirty="0">
+                <a:solidFill>
+                  <a:srgbClr val="1A2434"/>
+                </a:solidFill>
+                <a:latin typeface="Arial" pitchFamily="34" charset="0"/>
+                <a:cs typeface="Arial" pitchFamily="34" charset="0"/>
+              </a:rPr>
+              <a:t>P. Lewis et al. (2020), “Retrieval-Augmented Generation for Knowledge-Intensive NLP Tasks”, NeurIPS — arXiv:2005.11401.</a:t>
+            </a:r>
+          </a:p>
+          <a:p>
+            <a:pPr marL="205740" indent="-205740" algn="l">
+              <a:lnSpc>
+                <a:spcPct val="100000"/>
+              </a:lnSpc>
+              <a:spcBef>
+                <a:spcPts val="0"/>
+              </a:spcBef>
+              <a:spcAft>
+                <a:spcPts val="200"/>
+              </a:spcAft>
+              <a:buFont typeface="Arial" panose="020B0604020202020204" pitchFamily="34" charset="0"/>
+              <a:buChar char="•"/>
+            </a:pPr>
+            <a:r>
+              <a:rPr lang="en-US" sz="1200" b="0" i="0" dirty="0">
+                <a:solidFill>
+                  <a:srgbClr val="1A2434"/>
+                </a:solidFill>
+                <a:latin typeface="Arial" pitchFamily="34" charset="0"/>
+                <a:cs typeface="Arial" pitchFamily="34" charset="0"/>
+              </a:rPr>
+              <a:t>G. Cormack, C. Clarke and S. Buettcher (2009), “Reciprocal Rank Fusion Outperforms Condorcet and Individual Rank Learning Methods”, SIGIR — doi:10.1145/1571941.1572114.</a:t>
+            </a:r>
+          </a:p>
+          <a:p>
+            <a:pPr marL="205740" indent="-205740" algn="l">
+              <a:lnSpc>
+                <a:spcPct val="100000"/>
+              </a:lnSpc>
+              <a:spcBef>
+                <a:spcPts val="0"/>
+              </a:spcBef>
+              <a:spcAft>
+                <a:spcPts val="200"/>
+              </a:spcAft>
+              <a:buFont typeface="Arial" panose="020B0604020202020204" pitchFamily="34" charset="0"/>
+              <a:buChar char="•"/>
+            </a:pPr>
+            <a:r>
+              <a:rPr lang="en-US" sz="1200" b="0" i="0" dirty="0">
+                <a:solidFill>
+                  <a:srgbClr val="1A2434"/>
+                </a:solidFill>
+                <a:latin typeface="Arial" pitchFamily="34" charset="0"/>
+                <a:cs typeface="Arial" pitchFamily="34" charset="0"/>
+              </a:rPr>
+              <a:t>D. Edge et al. (2024), “From Local to Global: A Graph RAG Approach to Query-Focused Summarization” — arXiv:2404.16130.</a:t>
+            </a:r>
+          </a:p>
+          <a:p>
+            <a:pPr marL="0" indent="0" algn="l">
+              <a:lnSpc>
+                <a:spcPct val="100000"/>
+              </a:lnSpc>
+              <a:spcBef>
+                <a:spcPts val="400"/>
+              </a:spcBef>
+              <a:spcAft>
+                <a:spcPts val="250"/>
+              </a:spcAft>
+              <a:buNone/>
+            </a:pPr>
+            <a:r>
+              <a:rPr lang="en-US" sz="1350" b="1" i="0" dirty="0">
+                <a:solidFill>
+                  <a:srgbClr val="0B6FB4"/>
+                </a:solidFill>
+                <a:latin typeface="Arial" pitchFamily="34" charset="0"/>
+                <a:cs typeface="Arial" pitchFamily="34" charset="0"/>
+              </a:rPr>
+              <a:t>Models we run locally</a:t>
+            </a:r>
+          </a:p>
+          <a:p>
+            <a:pPr marL="205740" indent="-205740" algn="l">
+              <a:lnSpc>
+                <a:spcPct val="100000"/>
+              </a:lnSpc>
+              <a:spcBef>
+                <a:spcPts val="0"/>
+              </a:spcBef>
+              <a:spcAft>
+                <a:spcPts val="200"/>
+              </a:spcAft>
+              <a:buFont typeface="Arial" panose="020B0604020202020204" pitchFamily="34" charset="0"/>
+              <a:buChar char="•"/>
+            </a:pPr>
+            <a:r>
+              <a:rPr lang="en-US" sz="1200" b="0" i="0" dirty="0">
+                <a:solidFill>
+                  <a:srgbClr val="1A2434"/>
+                </a:solidFill>
+                <a:latin typeface="Arial" pitchFamily="34" charset="0"/>
+                <a:cs typeface="Arial" pitchFamily="34" charset="0"/>
+              </a:rPr>
+              <a:t>J. Chen et al. (2024), “M3-Embedding” (BGE-M3) — arXiv:2402.03216   ·   S. Xiao et al. (2023), “C-Pack” (BGE rerankers) — arXiv:2309.07597.</a:t>
+            </a:r>
+          </a:p>
+          <a:p>
+            <a:pPr marL="205740" indent="-205740" algn="l">
+              <a:lnSpc>
+                <a:spcPct val="100000"/>
+              </a:lnSpc>
+              <a:spcBef>
+                <a:spcPts val="0"/>
+              </a:spcBef>
+              <a:spcAft>
+                <a:spcPts val="200"/>
+              </a:spcAft>
+              <a:buFont typeface="Arial" panose="020B0604020202020204" pitchFamily="34" charset="0"/>
+              <a:buChar char="•"/>
+            </a:pPr>
+            <a:r>
+              <a:rPr lang="en-US" sz="1200" b="0" i="0" dirty="0">
+                <a:solidFill>
+                  <a:srgbClr val="1A2434"/>
+                </a:solidFill>
+                <a:latin typeface="Arial" pitchFamily="34" charset="0"/>
+                <a:cs typeface="Arial" pitchFamily="34" charset="0"/>
+              </a:rPr>
+              <a:t>X. Zhai et al. (2023), “Sigmoid Loss for Language Image Pre-Training” (SigLIP), ICCV — arXiv:2303.15343.</a:t>
+            </a:r>
+          </a:p>
+          <a:p>
+            <a:pPr marL="205740" indent="-205740" algn="l">
+              <a:lnSpc>
+                <a:spcPct val="100000"/>
+              </a:lnSpc>
+              <a:spcBef>
+                <a:spcPts val="0"/>
+              </a:spcBef>
+              <a:spcAft>
+                <a:spcPts val="200"/>
+              </a:spcAft>
+              <a:buFont typeface="Arial" panose="020B0604020202020204" pitchFamily="34" charset="0"/>
+              <a:buChar char="•"/>
+            </a:pPr>
+            <a:r>
+              <a:rPr lang="en-US" sz="1200" b="0" i="0" dirty="0">
+                <a:solidFill>
+                  <a:srgbClr val="1A2434"/>
+                </a:solidFill>
+                <a:latin typeface="Arial" pitchFamily="34" charset="0"/>
+                <a:cs typeface="Arial" pitchFamily="34" charset="0"/>
+              </a:rPr>
+              <a:t>Qwen Team (2025), “Qwen3-VL Technical Report” — arXiv:2511.21631  ·  https://github.com/QwenLM/Qwen3-VL.</a:t>
+            </a:r>
+          </a:p>
+          <a:p>
+            <a:pPr marL="0" indent="0" algn="l">
+              <a:lnSpc>
+                <a:spcPct val="100000"/>
+              </a:lnSpc>
+              <a:spcBef>
+                <a:spcPts val="400"/>
+              </a:spcBef>
+              <a:spcAft>
+                <a:spcPts val="250"/>
+              </a:spcAft>
+              <a:buNone/>
+            </a:pPr>
+            <a:r>
+              <a:rPr lang="en-US" sz="1350" b="1" i="0" dirty="0">
+                <a:solidFill>
+                  <a:srgbClr val="0B6FB4"/>
+                </a:solidFill>
+                <a:latin typeface="Arial" pitchFamily="34" charset="0"/>
+                <a:cs typeface="Arial" pitchFamily="34" charset="0"/>
+              </a:rPr>
+              <a:t>Tools and our own work</a:t>
+            </a:r>
+          </a:p>
+          <a:p>
+            <a:pPr marL="205740" indent="-205740" algn="l">
+              <a:lnSpc>
+                <a:spcPct val="100000"/>
+              </a:lnSpc>
+              <a:spcBef>
+                <a:spcPts val="0"/>
+              </a:spcBef>
+              <a:spcAft>
+                <a:spcPts val="200"/>
+              </a:spcAft>
+              <a:buFont typeface="Arial" panose="020B0604020202020204" pitchFamily="34" charset="0"/>
+              <a:buChar char="•"/>
+            </a:pPr>
+            <a:r>
+              <a:rPr lang="en-US" sz="1200" b="0" i="0" dirty="0">
+                <a:solidFill>
+                  <a:srgbClr val="1A2434"/>
+                </a:solidFill>
+                <a:latin typeface="Arial" pitchFamily="34" charset="0"/>
+                <a:cs typeface="Arial" pitchFamily="34" charset="0"/>
+              </a:rPr>
+              <a:t>Neo4j vector indexes and full-text search — https://neo4j.com/docs   ·   PyMuPDF — https://pymupdf.readthedocs.io   ·   SymPy — https://www.sympy.org</a:t>
+            </a:r>
+          </a:p>
+          <a:p>
+            <a:pPr marL="205740" indent="-205740" algn="l">
+              <a:lnSpc>
+                <a:spcPct val="100000"/>
+              </a:lnSpc>
+              <a:spcBef>
+                <a:spcPts val="0"/>
+              </a:spcBef>
+              <a:spcAft>
+                <a:spcPts val="200"/>
+              </a:spcAft>
+              <a:buFont typeface="Arial" panose="020B0604020202020204" pitchFamily="34" charset="0"/>
+              <a:buChar char="•"/>
+            </a:pPr>
+            <a:r>
+              <a:rPr lang="en-US" sz="1200" b="0" i="0" dirty="0">
+                <a:solidFill>
+                  <a:srgbClr val="1A2434"/>
+                </a:solidFill>
+                <a:latin typeface="Arial" pitchFamily="34" charset="0"/>
+                <a:cs typeface="Arial" pitchFamily="34" charset="0"/>
+              </a:rPr>
+              <a:t>Project repository and full technical README — https://github.com/Nnik345/sih-stem-rag</a:t>
+            </a:r>
           </a:p>
         </p:txBody>
       </p:sp>
@@ -8018,23 +8916,6 @@
               <a:tabLst/>
               <a:defRPr/>
             </a:pPr>
-            <a:r>
-              <a:rPr kumimoji="0" lang="en-US" sz="1200" b="0" i="0" u="none" strike="noStrike" kern="1200" cap="none" spc="0" normalizeH="0" baseline="0" noProof="0">
-                <a:ln>
-                  <a:noFill/>
-                </a:ln>
-                <a:solidFill>
-                  <a:prstClr val="white"/>
-                </a:solidFill>
-                <a:effectLst/>
-                <a:uLnTx/>
-                <a:uFillTx/>
-                <a:latin typeface="TradeGothic"/>
-                <a:ea typeface="+mn-ea"/>
-                <a:cs typeface="+mn-cs"/>
-              </a:rPr>
-              <a:t>@SIH Idea submission- Template</a:t>
-            </a:r>
             <a:endParaRPr kumimoji="0" lang="en-US" sz="1200" b="0" i="0" u="none" strike="noStrike" kern="1200" cap="none" spc="0" normalizeH="0" baseline="0" noProof="0" dirty="0">
               <a:ln>
                 <a:noFill/>
@@ -8060,7 +8941,7 @@
                 <a16:creationId xmlns:a16="http://schemas.microsoft.com/office/drawing/2014/main" id="{5DBCE864-823D-4A13-9607-5DA1F0ED5FB8}"/>
               </a:ext>
               <a:ext uri="{C183D7F6-B498-43B3-948B-1728B52AA6E4}">
-                <adec:decorative xmlns:adec="http://schemas.microsoft.com/office/drawing/2017/decorative" xmlns="" val="0"/>
+                <adec:decorative xmlns:adec="http://schemas.microsoft.com/office/drawing/2017/decorative" val="0"/>
               </a:ext>
             </a:extLst>
           </p:cNvPr>
@@ -8069,8 +8950,8 @@
         </p:nvSpPr>
         <p:spPr>
           <a:xfrm>
-            <a:off x="329773" y="252246"/>
-            <a:ext cx="1251857" cy="807334"/>
+            <a:off x="218941" y="252246"/>
+            <a:ext cx="1461752" cy="807334"/>
           </a:xfrm>
           <a:prstGeom prst="ellipse">
             <a:avLst/>
@@ -8097,7 +8978,7 @@
             <a:pPr algn="ctr"/>
             <a:r>
               <a:rPr lang="en-US" dirty="0"/>
-              <a:t>Your Team Name</a:t>
+              <a:t>Jura Tempest</a:t>
             </a:r>
             <a:endParaRPr lang="en-IN" dirty="0"/>
           </a:p>
@@ -8136,860 +9017,7 @@
     </p:spTree>
     <p:extLst>
       <p:ext uri="{BB962C8B-B14F-4D97-AF65-F5344CB8AC3E}">
-        <p14:creationId xmlns:p14="http://schemas.microsoft.com/office/powerpoint/2010/main" val="3916788613"/>
-      </p:ext>
-    </p:extLst>
-  </p:cSld>
-  <p:clrMapOvr>
-    <a:masterClrMapping/>
-  </p:clrMapOvr>
-</p:sld>
-</file>
-
-<file path=ppt/slides/slide7.xml><?xml version="1.0" encoding="utf-8"?>
-<p:sld xmlns:a="http://schemas.openxmlformats.org/drawingml/2006/main" xmlns:r="http://schemas.openxmlformats.org/officeDocument/2006/relationships" xmlns:p="http://schemas.openxmlformats.org/presentationml/2006/main">
-  <p:cSld>
-    <p:spTree>
-      <p:nvGrpSpPr>
-        <p:cNvPr id="1" name=""/>
-        <p:cNvGrpSpPr/>
-        <p:nvPr/>
-      </p:nvGrpSpPr>
-      <p:grpSpPr>
-        <a:xfrm>
-          <a:off x="0" y="0"/>
-          <a:ext cx="0" cy="0"/>
-          <a:chOff x="0" y="0"/>
-          <a:chExt cx="0" cy="0"/>
-        </a:xfrm>
-      </p:grpSpPr>
-      <p:sp>
-        <p:nvSpPr>
-          <p:cNvPr id="10" name="Rectangle 9">
-            <a:extLst>
-              <a:ext uri="{FF2B5EF4-FFF2-40B4-BE49-F238E27FC236}">
-                <a16:creationId xmlns:a16="http://schemas.microsoft.com/office/drawing/2014/main" id="{AD4F69D3-EEB0-4C4C-9434-B9960FB5854C}"/>
-              </a:ext>
-            </a:extLst>
-          </p:cNvPr>
-          <p:cNvSpPr>
-            <a:spLocks noChangeArrowheads="1"/>
-          </p:cNvSpPr>
-          <p:nvPr/>
-        </p:nvSpPr>
-        <p:spPr bwMode="auto">
-          <a:xfrm>
-            <a:off x="0" y="6354762"/>
-            <a:ext cx="12191999" cy="503238"/>
-          </a:xfrm>
-          <a:prstGeom prst="rect">
-            <a:avLst/>
-          </a:prstGeom>
-          <a:solidFill>
-            <a:srgbClr val="0070C0"/>
-          </a:solidFill>
-          <a:ln w="9525">
-            <a:noFill/>
-            <a:miter lim="800000"/>
-            <a:headEnd/>
-            <a:tailEnd/>
-          </a:ln>
-          <a:effectLst>
-            <a:outerShdw dist="23000" dir="5400000" rotWithShape="0">
-              <a:srgbClr val="808080">
-                <a:alpha val="34999"/>
-              </a:srgbClr>
-            </a:outerShdw>
-          </a:effectLst>
-        </p:spPr>
-        <p:txBody>
-          <a:bodyPr anchor="ctr"/>
-          <a:lstStyle/>
-          <a:p>
-            <a:pPr marL="0" marR="0" lvl="0" indent="0" algn="ctr" defTabSz="457200" rtl="0" eaLnBrk="1" fontAlgn="auto" latinLnBrk="0" hangingPunct="1">
-              <a:lnSpc>
-                <a:spcPct val="100000"/>
-              </a:lnSpc>
-              <a:spcBef>
-                <a:spcPts val="0"/>
-              </a:spcBef>
-              <a:spcAft>
-                <a:spcPts val="0"/>
-              </a:spcAft>
-              <a:buClrTx/>
-              <a:buSzTx/>
-              <a:buFontTx/>
-              <a:buNone/>
-              <a:tabLst/>
-              <a:defRPr/>
-            </a:pPr>
-            <a:endParaRPr kumimoji="0" lang="en-US" sz="1800" b="0" i="0" u="none" strike="noStrike" kern="1200" cap="none" spc="0" normalizeH="0" baseline="0" noProof="0" dirty="0">
-              <a:ln>
-                <a:noFill/>
-              </a:ln>
-              <a:solidFill>
-                <a:srgbClr val="C0504D">
-                  <a:lumMod val="75000"/>
-                </a:srgbClr>
-              </a:solidFill>
-              <a:effectLst/>
-              <a:uLnTx/>
-              <a:uFillTx/>
-              <a:latin typeface="Calibri"/>
-              <a:ea typeface="ＭＳ Ｐゴシック" pitchFamily="1" charset="-128"/>
-              <a:cs typeface="+mn-cs"/>
-            </a:endParaRPr>
-          </a:p>
-        </p:txBody>
-      </p:sp>
-      <p:sp>
-        <p:nvSpPr>
-          <p:cNvPr id="6" name="Slide Number Placeholder 5"/>
-          <p:cNvSpPr>
-            <a:spLocks noGrp="1"/>
-          </p:cNvSpPr>
-          <p:nvPr>
-            <p:ph type="sldNum" sz="quarter" idx="12"/>
-          </p:nvPr>
-        </p:nvSpPr>
-        <p:spPr/>
-        <p:txBody>
-          <a:bodyPr/>
-          <a:lstStyle/>
-          <a:p>
-            <a:pPr marL="0" marR="0" lvl="0" indent="0" algn="r" defTabSz="457200" rtl="0" eaLnBrk="1" fontAlgn="base" latinLnBrk="0" hangingPunct="1">
-              <a:lnSpc>
-                <a:spcPct val="100000"/>
-              </a:lnSpc>
-              <a:spcBef>
-                <a:spcPct val="0"/>
-              </a:spcBef>
-              <a:spcAft>
-                <a:spcPct val="0"/>
-              </a:spcAft>
-              <a:buClrTx/>
-              <a:buSzTx/>
-              <a:buFontTx/>
-              <a:buNone/>
-              <a:tabLst/>
-              <a:defRPr/>
-            </a:pPr>
-            <a:fld id="{677C3CE7-23F7-4828-823C-E0205DF2CF97}" type="slidenum">
-              <a:rPr kumimoji="0" lang="en-US" sz="1200" b="1" i="0" u="none" strike="noStrike" kern="1200" cap="none" spc="0" normalizeH="0" baseline="0" noProof="0">
-                <a:ln>
-                  <a:noFill/>
-                </a:ln>
-                <a:solidFill>
-                  <a:prstClr val="white"/>
-                </a:solidFill>
-                <a:effectLst/>
-                <a:uLnTx/>
-                <a:uFillTx/>
-                <a:latin typeface="TradeGothic" pitchFamily="1" charset="0"/>
-                <a:ea typeface="ＭＳ Ｐゴシック" pitchFamily="1" charset="-128"/>
-                <a:cs typeface="+mn-cs"/>
-              </a:rPr>
-              <a:pPr marL="0" marR="0" lvl="0" indent="0" algn="r" defTabSz="457200" rtl="0" eaLnBrk="1" fontAlgn="base" latinLnBrk="0" hangingPunct="1">
-                <a:lnSpc>
-                  <a:spcPct val="100000"/>
-                </a:lnSpc>
-                <a:spcBef>
-                  <a:spcPct val="0"/>
-                </a:spcBef>
-                <a:spcAft>
-                  <a:spcPct val="0"/>
-                </a:spcAft>
-                <a:buClrTx/>
-                <a:buSzTx/>
-                <a:buFontTx/>
-                <a:buNone/>
-                <a:tabLst/>
-                <a:defRPr/>
-              </a:pPr>
-              <a:t>7</a:t>
-            </a:fld>
-            <a:endParaRPr kumimoji="0" lang="en-US" sz="1200" b="1" i="0" u="none" strike="noStrike" kern="1200" cap="none" spc="0" normalizeH="0" baseline="0" noProof="0" dirty="0">
-              <a:ln>
-                <a:noFill/>
-              </a:ln>
-              <a:solidFill>
-                <a:prstClr val="white"/>
-              </a:solidFill>
-              <a:effectLst/>
-              <a:uLnTx/>
-              <a:uFillTx/>
-              <a:latin typeface="TradeGothic" pitchFamily="1" charset="0"/>
-              <a:ea typeface="ＭＳ Ｐゴシック" pitchFamily="1" charset="-128"/>
-              <a:cs typeface="+mn-cs"/>
-            </a:endParaRPr>
-          </a:p>
-        </p:txBody>
-      </p:sp>
-      <p:sp>
-        <p:nvSpPr>
-          <p:cNvPr id="7" name="Footer Placeholder 6"/>
-          <p:cNvSpPr>
-            <a:spLocks noGrp="1"/>
-          </p:cNvSpPr>
-          <p:nvPr>
-            <p:ph type="ftr" sz="quarter" idx="11"/>
-          </p:nvPr>
-        </p:nvSpPr>
-        <p:spPr>
-          <a:xfrm>
-            <a:off x="4648200" y="6356353"/>
-            <a:ext cx="3204000" cy="365125"/>
-          </a:xfrm>
-        </p:spPr>
-        <p:txBody>
-          <a:bodyPr/>
-          <a:lstStyle/>
-          <a:p>
-            <a:pPr marL="0" marR="0" lvl="0" indent="0" algn="ctr" defTabSz="457200" rtl="0" eaLnBrk="1" fontAlgn="auto" latinLnBrk="0" hangingPunct="1">
-              <a:lnSpc>
-                <a:spcPct val="100000"/>
-              </a:lnSpc>
-              <a:spcBef>
-                <a:spcPts val="0"/>
-              </a:spcBef>
-              <a:spcAft>
-                <a:spcPts val="0"/>
-              </a:spcAft>
-              <a:buClrTx/>
-              <a:buSzTx/>
-              <a:buFontTx/>
-              <a:buNone/>
-              <a:tabLst/>
-              <a:defRPr/>
-            </a:pPr>
-            <a:r>
-              <a:rPr kumimoji="0" lang="en-US" sz="1200" b="0" i="0" u="none" strike="noStrike" kern="1200" cap="none" spc="0" normalizeH="0" baseline="0" noProof="0">
-                <a:ln>
-                  <a:noFill/>
-                </a:ln>
-                <a:solidFill>
-                  <a:prstClr val="white"/>
-                </a:solidFill>
-                <a:effectLst/>
-                <a:uLnTx/>
-                <a:uFillTx/>
-                <a:latin typeface="TradeGothic"/>
-                <a:ea typeface="+mn-ea"/>
-                <a:cs typeface="+mn-cs"/>
-              </a:rPr>
-              <a:t>@SIH Idea submission- Template</a:t>
-            </a:r>
-            <a:endParaRPr kumimoji="0" lang="en-US" sz="1200" b="0" i="0" u="none" strike="noStrike" kern="1200" cap="none" spc="0" normalizeH="0" baseline="0" noProof="0" dirty="0">
-              <a:ln>
-                <a:noFill/>
-              </a:ln>
-              <a:solidFill>
-                <a:prstClr val="white"/>
-              </a:solidFill>
-              <a:effectLst/>
-              <a:uLnTx/>
-              <a:uFillTx/>
-              <a:latin typeface="TradeGothic"/>
-              <a:ea typeface="+mn-ea"/>
-              <a:cs typeface="+mn-cs"/>
-            </a:endParaRPr>
-          </a:p>
-        </p:txBody>
-      </p:sp>
-      <p:sp>
-        <p:nvSpPr>
-          <p:cNvPr id="3" name="Round Diagonal Corner Rectangle 2"/>
-          <p:cNvSpPr/>
-          <p:nvPr/>
-        </p:nvSpPr>
-        <p:spPr>
-          <a:xfrm>
-            <a:off x="0" y="1791032"/>
-            <a:ext cx="12192000" cy="4319200"/>
-          </a:xfrm>
-          <a:prstGeom prst="round2DiagRect">
-            <a:avLst/>
-          </a:prstGeom>
-          <a:solidFill>
-            <a:schemeClr val="accent1">
-              <a:lumMod val="20000"/>
-              <a:lumOff val="80000"/>
-            </a:schemeClr>
-          </a:solidFill>
-          <a:ln w="38100"/>
-        </p:spPr>
-        <p:style>
-          <a:lnRef idx="1">
-            <a:schemeClr val="accent1"/>
-          </a:lnRef>
-          <a:fillRef idx="3">
-            <a:schemeClr val="accent1"/>
-          </a:fillRef>
-          <a:effectRef idx="2">
-            <a:schemeClr val="accent1"/>
-          </a:effectRef>
-          <a:fontRef idx="minor">
-            <a:schemeClr val="lt1"/>
-          </a:fontRef>
-        </p:style>
-        <p:txBody>
-          <a:bodyPr rtlCol="0" anchor="ctr"/>
-          <a:lstStyle/>
-          <a:p>
-            <a:pPr algn="ctr"/>
-            <a:endParaRPr lang="en-IN"/>
-          </a:p>
-        </p:txBody>
-      </p:sp>
-      <p:sp>
-        <p:nvSpPr>
-          <p:cNvPr id="12" name="Google Shape;100;p3"/>
-          <p:cNvSpPr txBox="1"/>
-          <p:nvPr/>
-        </p:nvSpPr>
-        <p:spPr>
-          <a:xfrm>
-            <a:off x="367832" y="1915454"/>
-            <a:ext cx="11764736" cy="4070356"/>
-          </a:xfrm>
-          <a:prstGeom prst="rect">
-            <a:avLst/>
-          </a:prstGeom>
-          <a:noFill/>
-          <a:ln>
-            <a:noFill/>
-          </a:ln>
-        </p:spPr>
-        <p:txBody>
-          <a:bodyPr spcFirstLastPara="1" wrap="square" lIns="91425" tIns="45700" rIns="91425" bIns="45700" anchor="t" anchorCtr="0">
-            <a:noAutofit/>
-          </a:bodyPr>
-          <a:lstStyle/>
-          <a:p>
-            <a:pPr marL="514350" marR="0" lvl="0" indent="-514350" algn="just" rtl="0">
-              <a:lnSpc>
-                <a:spcPct val="90000"/>
-              </a:lnSpc>
-              <a:spcBef>
-                <a:spcPts val="0"/>
-              </a:spcBef>
-              <a:spcAft>
-                <a:spcPts val="0"/>
-              </a:spcAft>
-              <a:buClr>
-                <a:schemeClr val="dk1"/>
-              </a:buClr>
-              <a:buSzPct val="100000"/>
-              <a:buFont typeface="Calibri"/>
-              <a:buAutoNum type="arabicPeriod"/>
-            </a:pPr>
-            <a:r>
-              <a:rPr lang="en-US" b="1" i="0" u="none" strike="noStrike" cap="none" dirty="0">
-                <a:solidFill>
-                  <a:schemeClr val="dk1"/>
-                </a:solidFill>
-                <a:latin typeface="Arial" panose="020B0604020202020204" pitchFamily="34" charset="0"/>
-                <a:ea typeface="Calibri"/>
-                <a:cs typeface="Arial" panose="020B0604020202020204" pitchFamily="34" charset="0"/>
-                <a:sym typeface="Calibri"/>
-              </a:rPr>
-              <a:t>Kindly keep the maximum slides limit up to six </a:t>
-            </a:r>
-            <a:r>
-              <a:rPr lang="en-US" b="1" i="0" u="none" strike="noStrike" cap="none" dirty="0">
-                <a:solidFill>
-                  <a:srgbClr val="C00000"/>
-                </a:solidFill>
-                <a:latin typeface="Arial" panose="020B0604020202020204" pitchFamily="34" charset="0"/>
-                <a:ea typeface="Calibri"/>
-                <a:cs typeface="Arial" panose="020B0604020202020204" pitchFamily="34" charset="0"/>
-                <a:sym typeface="Calibri"/>
-              </a:rPr>
-              <a:t>(6). </a:t>
-            </a:r>
-            <a:r>
-              <a:rPr lang="en-US" b="1" i="0" u="none" strike="noStrike" cap="none" dirty="0">
-                <a:solidFill>
-                  <a:schemeClr val="dk1"/>
-                </a:solidFill>
-                <a:latin typeface="Arial" panose="020B0604020202020204" pitchFamily="34" charset="0"/>
-                <a:ea typeface="Calibri"/>
-                <a:cs typeface="Arial" panose="020B0604020202020204" pitchFamily="34" charset="0"/>
-                <a:sym typeface="Calibri"/>
-              </a:rPr>
-              <a:t>( Including the </a:t>
-            </a:r>
-            <a:r>
-              <a:rPr lang="en-US" b="1" i="0" u="none" strike="noStrike" cap="none">
-                <a:solidFill>
-                  <a:schemeClr val="dk1"/>
-                </a:solidFill>
-                <a:latin typeface="Arial" panose="020B0604020202020204" pitchFamily="34" charset="0"/>
-                <a:ea typeface="Calibri"/>
-                <a:cs typeface="Arial" panose="020B0604020202020204" pitchFamily="34" charset="0"/>
-                <a:sym typeface="Calibri"/>
-              </a:rPr>
-              <a:t>title slide) </a:t>
-            </a:r>
-            <a:endParaRPr b="1" dirty="0">
-              <a:latin typeface="Arial" panose="020B0604020202020204" pitchFamily="34" charset="0"/>
-              <a:cs typeface="Arial" panose="020B0604020202020204" pitchFamily="34" charset="0"/>
-            </a:endParaRPr>
-          </a:p>
-          <a:p>
-            <a:pPr marL="514350" marR="0" lvl="0" indent="-514350" algn="just" rtl="0">
-              <a:lnSpc>
-                <a:spcPct val="90000"/>
-              </a:lnSpc>
-              <a:spcBef>
-                <a:spcPts val="1000"/>
-              </a:spcBef>
-              <a:spcAft>
-                <a:spcPts val="0"/>
-              </a:spcAft>
-              <a:buClr>
-                <a:schemeClr val="dk1"/>
-              </a:buClr>
-              <a:buSzPct val="100000"/>
-              <a:buFont typeface="Calibri"/>
-              <a:buAutoNum type="arabicPeriod"/>
-            </a:pPr>
-            <a:r>
-              <a:rPr lang="en-US" b="1" i="0" u="none" strike="noStrike" cap="none" dirty="0">
-                <a:solidFill>
-                  <a:schemeClr val="dk1"/>
-                </a:solidFill>
-                <a:latin typeface="Arial" panose="020B0604020202020204" pitchFamily="34" charset="0"/>
-                <a:ea typeface="Calibri"/>
-                <a:cs typeface="Arial" panose="020B0604020202020204" pitchFamily="34" charset="0"/>
-                <a:sym typeface="Calibri"/>
-              </a:rPr>
-              <a:t>Try to avoid paragraphs and post your idea in points /diagrams / Infographics /pictures </a:t>
-            </a:r>
-            <a:endParaRPr b="1" dirty="0">
-              <a:latin typeface="Arial" panose="020B0604020202020204" pitchFamily="34" charset="0"/>
-              <a:cs typeface="Arial" panose="020B0604020202020204" pitchFamily="34" charset="0"/>
-            </a:endParaRPr>
-          </a:p>
-          <a:p>
-            <a:pPr marL="514350" marR="0" lvl="0" indent="-514350" algn="just" rtl="0">
-              <a:lnSpc>
-                <a:spcPct val="90000"/>
-              </a:lnSpc>
-              <a:spcBef>
-                <a:spcPts val="1000"/>
-              </a:spcBef>
-              <a:spcAft>
-                <a:spcPts val="0"/>
-              </a:spcAft>
-              <a:buClr>
-                <a:schemeClr val="dk1"/>
-              </a:buClr>
-              <a:buSzPct val="100000"/>
-              <a:buFont typeface="Calibri"/>
-              <a:buAutoNum type="arabicPeriod"/>
-            </a:pPr>
-            <a:r>
-              <a:rPr lang="en-US" b="1" i="0" u="none" strike="noStrike" cap="none" dirty="0">
-                <a:solidFill>
-                  <a:schemeClr val="dk1"/>
-                </a:solidFill>
-                <a:latin typeface="Arial" panose="020B0604020202020204" pitchFamily="34" charset="0"/>
-                <a:ea typeface="Calibri"/>
-                <a:cs typeface="Arial" panose="020B0604020202020204" pitchFamily="34" charset="0"/>
-                <a:sym typeface="Calibri"/>
-              </a:rPr>
-              <a:t>Keep your explanation precise and easy to understand</a:t>
-            </a:r>
-            <a:endParaRPr b="1" dirty="0">
-              <a:latin typeface="Arial" panose="020B0604020202020204" pitchFamily="34" charset="0"/>
-              <a:cs typeface="Arial" panose="020B0604020202020204" pitchFamily="34" charset="0"/>
-            </a:endParaRPr>
-          </a:p>
-          <a:p>
-            <a:pPr marL="514350" marR="0" lvl="0" indent="-514350" algn="just" rtl="0">
-              <a:lnSpc>
-                <a:spcPct val="90000"/>
-              </a:lnSpc>
-              <a:spcBef>
-                <a:spcPts val="1000"/>
-              </a:spcBef>
-              <a:spcAft>
-                <a:spcPts val="0"/>
-              </a:spcAft>
-              <a:buClr>
-                <a:schemeClr val="dk1"/>
-              </a:buClr>
-              <a:buSzPct val="100000"/>
-              <a:buFont typeface="Calibri"/>
-              <a:buAutoNum type="arabicPeriod"/>
-            </a:pPr>
-            <a:r>
-              <a:rPr lang="en-US" b="1" i="0" u="none" strike="noStrike" cap="none" dirty="0">
-                <a:solidFill>
-                  <a:schemeClr val="dk1"/>
-                </a:solidFill>
-                <a:latin typeface="Arial" panose="020B0604020202020204" pitchFamily="34" charset="0"/>
-                <a:ea typeface="Calibri"/>
-                <a:cs typeface="Arial" panose="020B0604020202020204" pitchFamily="34" charset="0"/>
-                <a:sym typeface="Calibri"/>
-              </a:rPr>
-              <a:t>Idea should be unique and novel. </a:t>
-            </a:r>
-            <a:endParaRPr b="1" dirty="0">
-              <a:latin typeface="Arial" panose="020B0604020202020204" pitchFamily="34" charset="0"/>
-              <a:cs typeface="Arial" panose="020B0604020202020204" pitchFamily="34" charset="0"/>
-            </a:endParaRPr>
-          </a:p>
-          <a:p>
-            <a:pPr marL="514350" marR="0" lvl="0" indent="-514350" algn="just" rtl="0">
-              <a:lnSpc>
-                <a:spcPct val="90000"/>
-              </a:lnSpc>
-              <a:spcBef>
-                <a:spcPts val="1000"/>
-              </a:spcBef>
-              <a:spcAft>
-                <a:spcPts val="0"/>
-              </a:spcAft>
-              <a:buClr>
-                <a:schemeClr val="dk1"/>
-              </a:buClr>
-              <a:buSzPct val="100000"/>
-              <a:buFont typeface="Calibri"/>
-              <a:buAutoNum type="arabicPeriod"/>
-            </a:pPr>
-            <a:r>
-              <a:rPr lang="en-US" b="1" i="0" u="none" strike="noStrike" cap="none" dirty="0">
-                <a:solidFill>
-                  <a:schemeClr val="dk1"/>
-                </a:solidFill>
-                <a:latin typeface="Arial" panose="020B0604020202020204" pitchFamily="34" charset="0"/>
-                <a:ea typeface="Calibri"/>
-                <a:cs typeface="Arial" panose="020B0604020202020204" pitchFamily="34" charset="0"/>
-                <a:sym typeface="Calibri"/>
-              </a:rPr>
-              <a:t>You can only use provided </a:t>
-            </a:r>
-            <a:r>
-              <a:rPr lang="en-US" b="1" dirty="0">
-                <a:solidFill>
-                  <a:schemeClr val="dk1"/>
-                </a:solidFill>
-                <a:latin typeface="Arial" panose="020B0604020202020204" pitchFamily="34" charset="0"/>
-                <a:ea typeface="Calibri"/>
-                <a:cs typeface="Arial" panose="020B0604020202020204" pitchFamily="34" charset="0"/>
-                <a:sym typeface="Calibri"/>
-              </a:rPr>
-              <a:t>template</a:t>
-            </a:r>
-            <a:r>
-              <a:rPr lang="en-US" b="1" i="0" u="none" strike="noStrike" cap="none" dirty="0">
-                <a:solidFill>
-                  <a:schemeClr val="dk1"/>
-                </a:solidFill>
-                <a:latin typeface="Arial" panose="020B0604020202020204" pitchFamily="34" charset="0"/>
-                <a:ea typeface="Calibri"/>
-                <a:cs typeface="Arial" panose="020B0604020202020204" pitchFamily="34" charset="0"/>
-                <a:sym typeface="Calibri"/>
-              </a:rPr>
-              <a:t> for making the </a:t>
-            </a:r>
-            <a:r>
-              <a:rPr lang="en-US" b="1" dirty="0">
-                <a:solidFill>
-                  <a:schemeClr val="dk1"/>
-                </a:solidFill>
-                <a:latin typeface="Arial" panose="020B0604020202020204" pitchFamily="34" charset="0"/>
-                <a:ea typeface="Calibri"/>
-                <a:cs typeface="Arial" panose="020B0604020202020204" pitchFamily="34" charset="0"/>
-                <a:sym typeface="Calibri"/>
-              </a:rPr>
-              <a:t>PPT</a:t>
-            </a:r>
-            <a:r>
-              <a:rPr lang="en-US" b="1" i="0" u="none" strike="noStrike" cap="none" dirty="0">
-                <a:solidFill>
-                  <a:schemeClr val="dk1"/>
-                </a:solidFill>
-                <a:latin typeface="Arial" panose="020B0604020202020204" pitchFamily="34" charset="0"/>
-                <a:ea typeface="Calibri"/>
-                <a:cs typeface="Arial" panose="020B0604020202020204" pitchFamily="34" charset="0"/>
-                <a:sym typeface="Calibri"/>
-              </a:rPr>
-              <a:t> without changing the idea details pointers (mentioned in previous slides).</a:t>
-            </a:r>
-            <a:endParaRPr b="1" i="0" u="none" strike="noStrike" cap="none" dirty="0">
-              <a:solidFill>
-                <a:schemeClr val="dk1"/>
-              </a:solidFill>
-              <a:latin typeface="Arial" panose="020B0604020202020204" pitchFamily="34" charset="0"/>
-              <a:ea typeface="Calibri"/>
-              <a:cs typeface="Arial" panose="020B0604020202020204" pitchFamily="34" charset="0"/>
-              <a:sym typeface="Calibri"/>
-            </a:endParaRPr>
-          </a:p>
-          <a:p>
-            <a:pPr marL="514350" marR="0" lvl="0" indent="-514350" algn="just" rtl="0">
-              <a:lnSpc>
-                <a:spcPct val="90000"/>
-              </a:lnSpc>
-              <a:spcBef>
-                <a:spcPts val="1000"/>
-              </a:spcBef>
-              <a:spcAft>
-                <a:spcPts val="0"/>
-              </a:spcAft>
-              <a:buClr>
-                <a:schemeClr val="dk1"/>
-              </a:buClr>
-              <a:buSzPct val="100000"/>
-              <a:buFont typeface="Calibri"/>
-              <a:buAutoNum type="arabicPeriod"/>
-            </a:pPr>
-            <a:r>
-              <a:rPr lang="en-US" b="1" i="0" u="none" strike="noStrike" cap="none" dirty="0">
-                <a:solidFill>
-                  <a:schemeClr val="dk1"/>
-                </a:solidFill>
-                <a:latin typeface="Arial" panose="020B0604020202020204" pitchFamily="34" charset="0"/>
-                <a:ea typeface="Calibri"/>
-                <a:cs typeface="Arial" panose="020B0604020202020204" pitchFamily="34" charset="0"/>
-                <a:sym typeface="Calibri"/>
-              </a:rPr>
-              <a:t>You need to save the file in PDF and upload the same on portal. No PPT, Word Doc or any other format will be supported.</a:t>
-            </a:r>
-            <a:endParaRPr b="1" dirty="0">
-              <a:latin typeface="Arial" panose="020B0604020202020204" pitchFamily="34" charset="0"/>
-              <a:cs typeface="Arial" panose="020B0604020202020204" pitchFamily="34" charset="0"/>
-            </a:endParaRPr>
-          </a:p>
-          <a:p>
-            <a:pPr marL="514350" marR="0" lvl="0" indent="-349885" algn="just" rtl="0">
-              <a:lnSpc>
-                <a:spcPct val="90000"/>
-              </a:lnSpc>
-              <a:spcBef>
-                <a:spcPts val="1000"/>
-              </a:spcBef>
-              <a:spcAft>
-                <a:spcPts val="0"/>
-              </a:spcAft>
-              <a:buClr>
-                <a:schemeClr val="dk1"/>
-              </a:buClr>
-              <a:buSzPct val="100000"/>
-              <a:buFont typeface="Calibri"/>
-              <a:buNone/>
-            </a:pPr>
-            <a:endParaRPr b="1" i="0" u="none" strike="noStrike" cap="none" dirty="0">
-              <a:solidFill>
-                <a:schemeClr val="dk1"/>
-              </a:solidFill>
-              <a:latin typeface="Arial" panose="020B0604020202020204" pitchFamily="34" charset="0"/>
-              <a:ea typeface="Calibri"/>
-              <a:cs typeface="Arial" panose="020B0604020202020204" pitchFamily="34" charset="0"/>
-              <a:sym typeface="Calibri"/>
-            </a:endParaRPr>
-          </a:p>
-          <a:p>
-            <a:pPr marL="0" marR="0" lvl="0" indent="0" algn="just" rtl="0">
-              <a:lnSpc>
-                <a:spcPct val="90000"/>
-              </a:lnSpc>
-              <a:spcBef>
-                <a:spcPts val="1000"/>
-              </a:spcBef>
-              <a:spcAft>
-                <a:spcPts val="0"/>
-              </a:spcAft>
-              <a:buClr>
-                <a:schemeClr val="dk1"/>
-              </a:buClr>
-              <a:buSzPct val="100000"/>
-              <a:buFont typeface="Arial"/>
-              <a:buNone/>
-            </a:pPr>
-            <a:r>
-              <a:rPr lang="en-US" b="1" i="0" u="none" strike="noStrike" cap="none" dirty="0">
-                <a:solidFill>
-                  <a:srgbClr val="C00000"/>
-                </a:solidFill>
-                <a:latin typeface="Arial" panose="020B0604020202020204" pitchFamily="34" charset="0"/>
-                <a:ea typeface="Calibri"/>
-                <a:cs typeface="Arial" panose="020B0604020202020204" pitchFamily="34" charset="0"/>
-                <a:sym typeface="Calibri"/>
-              </a:rPr>
-              <a:t>Note - You can delete this slide (Important Pointers) when you upload the details of your idea on SIH portal.</a:t>
-            </a:r>
-            <a:endParaRPr b="1" dirty="0">
-              <a:solidFill>
-                <a:srgbClr val="C00000"/>
-              </a:solidFill>
-              <a:latin typeface="Arial" panose="020B0604020202020204" pitchFamily="34" charset="0"/>
-              <a:cs typeface="Arial" panose="020B0604020202020204" pitchFamily="34" charset="0"/>
-            </a:endParaRPr>
-          </a:p>
-          <a:p>
-            <a:pPr marL="914400" marR="0" lvl="1" indent="-316230" algn="just" rtl="0">
-              <a:lnSpc>
-                <a:spcPct val="90000"/>
-              </a:lnSpc>
-              <a:spcBef>
-                <a:spcPts val="500"/>
-              </a:spcBef>
-              <a:spcAft>
-                <a:spcPts val="0"/>
-              </a:spcAft>
-              <a:buClr>
-                <a:schemeClr val="dk1"/>
-              </a:buClr>
-              <a:buSzPct val="100000"/>
-              <a:buFont typeface="Calibri"/>
-              <a:buNone/>
-            </a:pPr>
-            <a:endParaRPr sz="2000" b="1" i="0" u="none" strike="noStrike" cap="none" dirty="0">
-              <a:solidFill>
-                <a:schemeClr val="dk1"/>
-              </a:solidFill>
-              <a:latin typeface="Arial" panose="020B0604020202020204" pitchFamily="34" charset="0"/>
-              <a:ea typeface="Calibri"/>
-              <a:cs typeface="Arial" panose="020B0604020202020204" pitchFamily="34" charset="0"/>
-              <a:sym typeface="Calibri"/>
-            </a:endParaRPr>
-          </a:p>
-        </p:txBody>
-      </p:sp>
-      <p:sp>
-        <p:nvSpPr>
-          <p:cNvPr id="4" name="TextBox 3"/>
-          <p:cNvSpPr txBox="1"/>
-          <p:nvPr/>
-        </p:nvSpPr>
-        <p:spPr>
-          <a:xfrm>
-            <a:off x="1393371" y="107066"/>
-            <a:ext cx="8410540" cy="646331"/>
-          </a:xfrm>
-          <a:prstGeom prst="rect">
-            <a:avLst/>
-          </a:prstGeom>
-          <a:noFill/>
-        </p:spPr>
-        <p:txBody>
-          <a:bodyPr wrap="square" rtlCol="0">
-            <a:spAutoFit/>
-          </a:bodyPr>
-          <a:lstStyle/>
-          <a:p>
-            <a:pPr algn="ctr"/>
-            <a:r>
-              <a:rPr lang="en-US" sz="3600" b="1" dirty="0">
-                <a:latin typeface="Times New Roman" panose="02020603050405020304" pitchFamily="18" charset="0"/>
-                <a:cs typeface="Times New Roman" panose="02020603050405020304" pitchFamily="18" charset="0"/>
-              </a:rPr>
-              <a:t>IMPORTANT INSTRUCTIONS</a:t>
-            </a:r>
-            <a:endParaRPr lang="en-IN" sz="3600" b="1" dirty="0">
-              <a:latin typeface="Times New Roman" panose="02020603050405020304" pitchFamily="18" charset="0"/>
-              <a:cs typeface="Times New Roman" panose="02020603050405020304" pitchFamily="18" charset="0"/>
-            </a:endParaRPr>
-          </a:p>
-        </p:txBody>
-      </p:sp>
-      <p:sp>
-        <p:nvSpPr>
-          <p:cNvPr id="5" name="TextBox 4"/>
-          <p:cNvSpPr txBox="1"/>
-          <p:nvPr/>
-        </p:nvSpPr>
-        <p:spPr>
-          <a:xfrm>
-            <a:off x="602343" y="1181900"/>
-            <a:ext cx="9557657" cy="341632"/>
-          </a:xfrm>
-          <a:prstGeom prst="rect">
-            <a:avLst/>
-          </a:prstGeom>
-          <a:noFill/>
-        </p:spPr>
-        <p:txBody>
-          <a:bodyPr wrap="square" rtlCol="0">
-            <a:spAutoFit/>
-          </a:bodyPr>
-          <a:lstStyle/>
-          <a:p>
-            <a:pPr algn="just">
-              <a:lnSpc>
-                <a:spcPct val="90000"/>
-              </a:lnSpc>
-              <a:spcBef>
-                <a:spcPts val="1000"/>
-              </a:spcBef>
-              <a:spcAft>
-                <a:spcPts val="0"/>
-              </a:spcAft>
-              <a:buClr>
-                <a:schemeClr val="dk1"/>
-              </a:buClr>
-              <a:buSzPct val="100000"/>
-            </a:pPr>
-            <a:r>
-              <a:rPr lang="en-US" b="1" dirty="0">
-                <a:solidFill>
-                  <a:schemeClr val="dk1"/>
-                </a:solidFill>
-                <a:latin typeface="Arial" panose="020B0604020202020204" pitchFamily="34" charset="0"/>
-                <a:ea typeface="Calibri"/>
-                <a:cs typeface="Arial" panose="020B0604020202020204" pitchFamily="34" charset="0"/>
-              </a:rPr>
-              <a:t>Please ensure below pointers are met while submitting the Idea PPT:</a:t>
-            </a:r>
-            <a:endParaRPr lang="en-IN" b="1" dirty="0">
-              <a:solidFill>
-                <a:schemeClr val="dk1"/>
-              </a:solidFill>
-              <a:latin typeface="Arial" panose="020B0604020202020204" pitchFamily="34" charset="0"/>
-              <a:ea typeface="Calibri"/>
-              <a:cs typeface="Arial" panose="020B0604020202020204" pitchFamily="34" charset="0"/>
-            </a:endParaRPr>
-          </a:p>
-        </p:txBody>
-      </p:sp>
-      <p:pic>
-        <p:nvPicPr>
-          <p:cNvPr id="13" name="Picture 12"/>
-          <p:cNvPicPr>
-            <a:picLocks noChangeAspect="1"/>
-          </p:cNvPicPr>
-          <p:nvPr/>
-        </p:nvPicPr>
-        <p:blipFill>
-          <a:blip r:embed="rId3">
-            <a:extLst>
-              <a:ext uri="{28A0092B-C50C-407E-A947-70E740481C1C}">
-                <a14:useLocalDpi xmlns:a14="http://schemas.microsoft.com/office/drawing/2010/main" val="0"/>
-              </a:ext>
-            </a:extLst>
-          </a:blip>
-          <a:stretch>
-            <a:fillRect/>
-          </a:stretch>
-        </p:blipFill>
-        <p:spPr>
-          <a:xfrm>
-            <a:off x="9780086" y="1500"/>
-            <a:ext cx="2249850" cy="1062337"/>
-          </a:xfrm>
-          <a:prstGeom prst="rect">
-            <a:avLst/>
-          </a:prstGeom>
-        </p:spPr>
-      </p:pic>
-    </p:spTree>
-    <p:extLst>
-      <p:ext uri="{BB962C8B-B14F-4D97-AF65-F5344CB8AC3E}">
-        <p14:creationId xmlns:p14="http://schemas.microsoft.com/office/powerpoint/2010/main" val="1588084416"/>
+        <p14:creationId xmlns:p14="http://schemas.microsoft.com/office/powerpoint/2010/main" val="1618150901"/>
       </p:ext>
     </p:extLst>
   </p:cSld>
